--- a/02_презентация/Презентация_v6_Не_просто_накормить.pptx
+++ b/02_презентация/Презентация_v6_Не_просто_накормить.pptx
@@ -4412,6 +4412,45 @@
         </p:nvSpPr>
         <p:spPr>
           <a:xfrm>
+            <a:off x="658368" y="6446520"/>
+            <a:ext cx="10241280" cy="228600"/>
+          </a:xfrm>
+          <a:prstGeom prst="rect">
+            <a:avLst/>
+          </a:prstGeom>
+          <a:noFill/>
+        </p:spPr>
+        <p:txBody>
+          <a:bodyPr wrap="square" anchor="t" lIns="0" rIns="0" tIns="0" bIns="0">
+            <a:spAutoFit/>
+          </a:bodyPr>
+          <a:lstStyle/>
+          <a:p>
+            <a:pPr algn="l">
+              <a:lnSpc>
+                <a:spcPct val="130000"/>
+              </a:lnSpc>
+            </a:pPr>
+            <a:r>
+              <a:rPr sz="900" b="0" i="0">
+                <a:solidFill>
+                  <a:srgbClr val="87867F"/>
+                </a:solidFill>
+                <a:latin typeface="PT Sans"/>
+              </a:rPr>
+              <a:t>Литературная редакция · раздел 25</a:t>
+            </a:r>
+          </a:p>
+        </p:txBody>
+      </p:sp>
+      <p:sp>
+        <p:nvSpPr>
+          <p:cNvPr id="15" name="TextBox 14"/>
+          <p:cNvSpPr txBox="1"/>
+          <p:nvPr/>
+        </p:nvSpPr>
+        <p:spPr>
+          <a:xfrm>
             <a:off x="11155680" y="6446520"/>
             <a:ext cx="640080" cy="228600"/>
           </a:xfrm>
@@ -5145,6 +5184,45 @@
         </p:nvSpPr>
         <p:spPr>
           <a:xfrm>
+            <a:off x="658368" y="6446520"/>
+            <a:ext cx="10241280" cy="228600"/>
+          </a:xfrm>
+          <a:prstGeom prst="rect">
+            <a:avLst/>
+          </a:prstGeom>
+          <a:noFill/>
+        </p:spPr>
+        <p:txBody>
+          <a:bodyPr wrap="square" anchor="t" lIns="0" rIns="0" tIns="0" bIns="0">
+            <a:spAutoFit/>
+          </a:bodyPr>
+          <a:lstStyle/>
+          <a:p>
+            <a:pPr algn="l">
+              <a:lnSpc>
+                <a:spcPct val="130000"/>
+              </a:lnSpc>
+            </a:pPr>
+            <a:r>
+              <a:rPr sz="900" b="0" i="0">
+                <a:solidFill>
+                  <a:srgbClr val="87867F"/>
+                </a:solidFill>
+                <a:latin typeface="PT Sans"/>
+              </a:rPr>
+              <a:t>Литературная редакция · раздел 30</a:t>
+            </a:r>
+          </a:p>
+        </p:txBody>
+      </p:sp>
+      <p:sp>
+        <p:nvSpPr>
+          <p:cNvPr id="19" name="TextBox 18"/>
+          <p:cNvSpPr txBox="1"/>
+          <p:nvPr/>
+        </p:nvSpPr>
+        <p:spPr>
+          <a:xfrm>
             <a:off x="11155680" y="6446520"/>
             <a:ext cx="640080" cy="228600"/>
           </a:xfrm>
@@ -5722,6 +5800,45 @@
         </p:nvSpPr>
         <p:spPr>
           <a:xfrm>
+            <a:off x="658368" y="6446520"/>
+            <a:ext cx="10241280" cy="228600"/>
+          </a:xfrm>
+          <a:prstGeom prst="rect">
+            <a:avLst/>
+          </a:prstGeom>
+          <a:noFill/>
+        </p:spPr>
+        <p:txBody>
+          <a:bodyPr wrap="square" anchor="t" lIns="0" rIns="0" tIns="0" bIns="0">
+            <a:spAutoFit/>
+          </a:bodyPr>
+          <a:lstStyle/>
+          <a:p>
+            <a:pPr algn="l">
+              <a:lnSpc>
+                <a:spcPct val="130000"/>
+              </a:lnSpc>
+            </a:pPr>
+            <a:r>
+              <a:rPr sz="900" b="0" i="0">
+                <a:solidFill>
+                  <a:srgbClr val="87867F"/>
+                </a:solidFill>
+                <a:latin typeface="PT Sans"/>
+              </a:rPr>
+              <a:t>Литературная редакция · раздел 4.0</a:t>
+            </a:r>
+          </a:p>
+        </p:txBody>
+      </p:sp>
+      <p:sp>
+        <p:nvSpPr>
+          <p:cNvPr id="15" name="TextBox 14"/>
+          <p:cNvSpPr txBox="1"/>
+          <p:nvPr/>
+        </p:nvSpPr>
+        <p:spPr>
+          <a:xfrm>
             <a:off x="11155680" y="6446520"/>
             <a:ext cx="640080" cy="228600"/>
           </a:xfrm>
@@ -6843,6 +6960,45 @@
         </p:nvSpPr>
         <p:spPr>
           <a:xfrm>
+            <a:off x="658368" y="6446520"/>
+            <a:ext cx="10241280" cy="228600"/>
+          </a:xfrm>
+          <a:prstGeom prst="rect">
+            <a:avLst/>
+          </a:prstGeom>
+          <a:noFill/>
+        </p:spPr>
+        <p:txBody>
+          <a:bodyPr wrap="square" anchor="t" lIns="0" rIns="0" tIns="0" bIns="0">
+            <a:spAutoFit/>
+          </a:bodyPr>
+          <a:lstStyle/>
+          <a:p>
+            <a:pPr algn="l">
+              <a:lnSpc>
+                <a:spcPct val="130000"/>
+              </a:lnSpc>
+            </a:pPr>
+            <a:r>
+              <a:rPr sz="900" b="0" i="0">
+                <a:solidFill>
+                  <a:srgbClr val="87867F"/>
+                </a:solidFill>
+                <a:latin typeface="PT Sans"/>
+              </a:rPr>
+              <a:t>Литературная редакция · разделы 19, 21</a:t>
+            </a:r>
+          </a:p>
+        </p:txBody>
+      </p:sp>
+      <p:sp>
+        <p:nvSpPr>
+          <p:cNvPr id="29" name="TextBox 28"/>
+          <p:cNvSpPr txBox="1"/>
+          <p:nvPr/>
+        </p:nvSpPr>
+        <p:spPr>
+          <a:xfrm>
             <a:off x="11155680" y="6446520"/>
             <a:ext cx="640080" cy="228600"/>
           </a:xfrm>
@@ -7831,6 +7987,45 @@
         </p:nvSpPr>
         <p:spPr>
           <a:xfrm>
+            <a:off x="658368" y="6446520"/>
+            <a:ext cx="10241280" cy="228600"/>
+          </a:xfrm>
+          <a:prstGeom prst="rect">
+            <a:avLst/>
+          </a:prstGeom>
+          <a:noFill/>
+        </p:spPr>
+        <p:txBody>
+          <a:bodyPr wrap="square" anchor="t" lIns="0" rIns="0" tIns="0" bIns="0">
+            <a:spAutoFit/>
+          </a:bodyPr>
+          <a:lstStyle/>
+          <a:p>
+            <a:pPr algn="l">
+              <a:lnSpc>
+                <a:spcPct val="130000"/>
+              </a:lnSpc>
+            </a:pPr>
+            <a:r>
+              <a:rPr sz="900" b="0" i="0">
+                <a:solidFill>
+                  <a:srgbClr val="87867F"/>
+                </a:solidFill>
+                <a:latin typeface="PT Sans"/>
+              </a:rPr>
+              <a:t>Литературная редакция · раздел 15</a:t>
+            </a:r>
+          </a:p>
+        </p:txBody>
+      </p:sp>
+      <p:sp>
+        <p:nvSpPr>
+          <p:cNvPr id="26" name="TextBox 25"/>
+          <p:cNvSpPr txBox="1"/>
+          <p:nvPr/>
+        </p:nvSpPr>
+        <p:spPr>
+          <a:xfrm>
             <a:off x="11155680" y="6446520"/>
             <a:ext cx="640080" cy="228600"/>
           </a:xfrm>
@@ -7922,7 +8117,7 @@
                 </a:solidFill>
                 <a:latin typeface="PT Sans"/>
               </a:rPr>
-              <a:t>ЧТО СДЕЛАТЬ В ПОНЕДЕЛЬНИК</a:t>
+              <a:t>ЧТО СДЕЛАТЬ В ПОНЕДЕЛЬНИК ДО ОБЕДА</a:t>
             </a:r>
           </a:p>
         </p:txBody>
@@ -7971,7 +8166,7 @@
         <p:spPr>
           <a:xfrm>
             <a:off x="658368" y="868680"/>
-            <a:ext cx="10972800" cy="640080"/>
+            <a:ext cx="10972800" cy="502920"/>
           </a:xfrm>
           <a:prstGeom prst="rect">
             <a:avLst/>
@@ -7996,7 +8191,7 @@
                 </a:solidFill>
                 <a:latin typeface="Playfair Display"/>
               </a:rPr>
-              <a:t>Пилот на 90 дней. Одно отделение.</a:t>
+              <a:t>Пять действий. Меню не трогают.</a:t>
             </a:r>
           </a:p>
         </p:txBody>
@@ -8029,13 +8224,13 @@
               </a:lnSpc>
             </a:pPr>
             <a:r>
-              <a:rPr sz="1800" b="0" i="1">
+              <a:rPr sz="1600" b="0" i="1">
                 <a:solidFill>
                   <a:srgbClr val="B8552F"/>
                 </a:solidFill>
                 <a:latin typeface="Playfair Display"/>
               </a:rPr>
-              <a:t>Один обед  ·  одно отделение  ·  одна неделя</a:t>
+              <a:t>Новой сметы не нужно. Врач входит в группу — ставит границу.</a:t>
             </a:r>
           </a:p>
         </p:txBody>
@@ -8048,8 +8243,8 @@
         </p:nvSpPr>
         <p:spPr>
           <a:xfrm>
-            <a:off x="658368" y="2286000"/>
-            <a:ext cx="2194560" cy="2468880"/>
+            <a:off x="658368" y="1920240"/>
+            <a:ext cx="2194560" cy="2606040"/>
           </a:xfrm>
           <a:prstGeom prst="roundRect">
             <a:avLst>
@@ -8093,8 +8288,8 @@
         </p:nvSpPr>
         <p:spPr>
           <a:xfrm>
-            <a:off x="658368" y="2468880"/>
-            <a:ext cx="2194560" cy="548640"/>
+            <a:off x="658368" y="2057400"/>
+            <a:ext cx="2194560" cy="457200"/>
           </a:xfrm>
           <a:prstGeom prst="rect">
             <a:avLst/>
@@ -8113,7 +8308,7 @@
               </a:lnSpc>
             </a:pPr>
             <a:r>
-              <a:rPr sz="3200" b="1" i="0">
+              <a:rPr sz="2800" b="1" i="0">
                 <a:solidFill>
                   <a:srgbClr val="C15F3C"/>
                 </a:solidFill>
@@ -8132,8 +8327,8 @@
         </p:nvSpPr>
         <p:spPr>
           <a:xfrm>
-            <a:off x="795528" y="3154680"/>
-            <a:ext cx="1920240" cy="640080"/>
+            <a:off x="749808" y="2606040"/>
+            <a:ext cx="2011679" cy="685800"/>
           </a:xfrm>
           <a:prstGeom prst="rect">
             <a:avLst/>
@@ -8148,17 +8343,17 @@
           <a:p>
             <a:pPr algn="ctr">
               <a:lnSpc>
-                <a:spcPct val="120000"/>
-              </a:lnSpc>
-            </a:pPr>
-            <a:r>
-              <a:rPr sz="1500" b="1" i="0">
+                <a:spcPct val="115000"/>
+              </a:lnSpc>
+            </a:pPr>
+            <a:r>
+              <a:rPr sz="1400" b="1" i="0">
                 <a:solidFill>
                   <a:srgbClr val="141413"/>
                 </a:solidFill>
                 <a:latin typeface="Playfair Display"/>
               </a:rPr>
-              <a:t>Замер</a:t>
+              <a:t>Сырьевая строка</a:t>
             </a:r>
           </a:p>
         </p:txBody>
@@ -8171,8 +8366,8 @@
         </p:nvSpPr>
         <p:spPr>
           <a:xfrm>
-            <a:off x="795528" y="3840480"/>
-            <a:ext cx="1920240" cy="822960"/>
+            <a:off x="768096" y="3337560"/>
+            <a:ext cx="1975104" cy="914400"/>
           </a:xfrm>
           <a:prstGeom prst="rect">
             <a:avLst/>
@@ -8187,18 +8382,18 @@
           <a:p>
             <a:pPr algn="ctr">
               <a:lnSpc>
-                <a:spcPct val="140000"/>
-              </a:lnSpc>
-            </a:pPr>
-            <a:r>
-              <a:rPr sz="1100" b="0" i="0">
+                <a:spcPct val="135000"/>
+              </a:lnSpc>
+            </a:pPr>
+            <a:r>
+              <a:rPr sz="1200" b="0" i="0">
                 <a:solidFill>
                   <a:srgbClr val="6E6A5E"/>
                 </a:solidFill>
                 <a:latin typeface="PT Sans"/>
               </a:rPr>
-              <a:t>7 дней
-ноль рублей</a:t>
+              <a:t>1 час
+руб./житель/день</a:t>
             </a:r>
           </a:p>
         </p:txBody>
@@ -8211,8 +8406,171 @@
         </p:nvSpPr>
         <p:spPr>
           <a:xfrm>
-            <a:off x="2926080" y="2286000"/>
-            <a:ext cx="2194560" cy="2468880"/>
+            <a:off x="2926080" y="1920240"/>
+            <a:ext cx="2194560" cy="2606040"/>
+          </a:xfrm>
+          <a:prstGeom prst="roundRect">
+            <a:avLst>
+              <a:gd name="adj" fmla="val 14000"/>
+            </a:avLst>
+          </a:prstGeom>
+          <a:solidFill>
+            <a:srgbClr val="C15F3C"/>
+          </a:solidFill>
+          <a:ln>
+            <a:noFill/>
+          </a:ln>
+        </p:spPr>
+        <p:style>
+          <a:lnRef idx="1">
+            <a:schemeClr val="accent1"/>
+          </a:lnRef>
+          <a:fillRef idx="3">
+            <a:schemeClr val="accent1"/>
+          </a:fillRef>
+          <a:effectRef idx="2">
+            <a:schemeClr val="accent1"/>
+          </a:effectRef>
+          <a:fontRef idx="minor">
+            <a:schemeClr val="lt1"/>
+          </a:fontRef>
+        </p:style>
+        <p:txBody>
+          <a:bodyPr rtlCol="0" anchor="ctr"/>
+          <a:lstStyle/>
+          <a:p>
+            <a:pPr algn="ctr"/>
+          </a:p>
+        </p:txBody>
+      </p:sp>
+      <p:sp>
+        <p:nvSpPr>
+          <p:cNvPr id="11" name="TextBox 10"/>
+          <p:cNvSpPr txBox="1"/>
+          <p:nvPr/>
+        </p:nvSpPr>
+        <p:spPr>
+          <a:xfrm>
+            <a:off x="2926080" y="2057400"/>
+            <a:ext cx="2194560" cy="457200"/>
+          </a:xfrm>
+          <a:prstGeom prst="rect">
+            <a:avLst/>
+          </a:prstGeom>
+          <a:noFill/>
+        </p:spPr>
+        <p:txBody>
+          <a:bodyPr wrap="square" anchor="t" lIns="0" rIns="0" tIns="0" bIns="0">
+            <a:spAutoFit/>
+          </a:bodyPr>
+          <a:lstStyle/>
+          <a:p>
+            <a:pPr algn="ctr">
+              <a:lnSpc>
+                <a:spcPct val="130000"/>
+              </a:lnSpc>
+            </a:pPr>
+            <a:r>
+              <a:rPr sz="2800" b="1" i="0">
+                <a:solidFill>
+                  <a:srgbClr val="FAF9F5"/>
+                </a:solidFill>
+                <a:latin typeface="Playfair Display"/>
+              </a:rPr>
+              <a:t>②</a:t>
+            </a:r>
+          </a:p>
+        </p:txBody>
+      </p:sp>
+      <p:sp>
+        <p:nvSpPr>
+          <p:cNvPr id="12" name="TextBox 11"/>
+          <p:cNvSpPr txBox="1"/>
+          <p:nvPr/>
+        </p:nvSpPr>
+        <p:spPr>
+          <a:xfrm>
+            <a:off x="3017520" y="2606040"/>
+            <a:ext cx="2011679" cy="685800"/>
+          </a:xfrm>
+          <a:prstGeom prst="rect">
+            <a:avLst/>
+          </a:prstGeom>
+          <a:noFill/>
+        </p:spPr>
+        <p:txBody>
+          <a:bodyPr wrap="square" anchor="t" lIns="0" rIns="0" tIns="0" bIns="0">
+            <a:spAutoFit/>
+          </a:bodyPr>
+          <a:lstStyle/>
+          <a:p>
+            <a:pPr algn="ctr">
+              <a:lnSpc>
+                <a:spcPct val="115000"/>
+              </a:lnSpc>
+            </a:pPr>
+            <a:r>
+              <a:rPr sz="1400" b="1" i="0">
+                <a:solidFill>
+                  <a:srgbClr val="FAF9F5"/>
+                </a:solidFill>
+                <a:latin typeface="Playfair Display"/>
+              </a:rPr>
+              <a:t>Замер 7 дней</a:t>
+            </a:r>
+          </a:p>
+        </p:txBody>
+      </p:sp>
+      <p:sp>
+        <p:nvSpPr>
+          <p:cNvPr id="13" name="TextBox 12"/>
+          <p:cNvSpPr txBox="1"/>
+          <p:nvPr/>
+        </p:nvSpPr>
+        <p:spPr>
+          <a:xfrm>
+            <a:off x="3035808" y="3337560"/>
+            <a:ext cx="1975104" cy="914400"/>
+          </a:xfrm>
+          <a:prstGeom prst="rect">
+            <a:avLst/>
+          </a:prstGeom>
+          <a:noFill/>
+        </p:spPr>
+        <p:txBody>
+          <a:bodyPr wrap="square" anchor="t" lIns="0" rIns="0" tIns="0" bIns="0">
+            <a:spAutoFit/>
+          </a:bodyPr>
+          <a:lstStyle/>
+          <a:p>
+            <a:pPr algn="ctr">
+              <a:lnSpc>
+                <a:spcPct val="135000"/>
+              </a:lnSpc>
+            </a:pPr>
+            <a:r>
+              <a:rPr sz="1200" b="0" i="0">
+                <a:solidFill>
+                  <a:srgbClr val="FAF9F5"/>
+                </a:solidFill>
+                <a:latin typeface="PT Sans"/>
+              </a:rPr>
+              <a:t>отходы
+и время раздачи</a:t>
+            </a:r>
+          </a:p>
+        </p:txBody>
+      </p:sp>
+      <p:sp>
+        <p:nvSpPr>
+          <p:cNvPr id="14" name="Rounded Rectangle 13"/>
+          <p:cNvSpPr/>
+          <p:nvPr/>
+        </p:nvSpPr>
+        <p:spPr>
+          <a:xfrm>
+            <a:off x="5193792" y="1920240"/>
+            <a:ext cx="2194560" cy="2606040"/>
           </a:xfrm>
           <a:prstGeom prst="roundRect">
             <a:avLst>
@@ -8250,14 +8608,14 @@
       </p:sp>
       <p:sp>
         <p:nvSpPr>
-          <p:cNvPr id="11" name="TextBox 10"/>
-          <p:cNvSpPr txBox="1"/>
-          <p:nvPr/>
-        </p:nvSpPr>
-        <p:spPr>
-          <a:xfrm>
-            <a:off x="2926080" y="2468880"/>
-            <a:ext cx="2194560" cy="548640"/>
+          <p:cNvPr id="15" name="TextBox 14"/>
+          <p:cNvSpPr txBox="1"/>
+          <p:nvPr/>
+        </p:nvSpPr>
+        <p:spPr>
+          <a:xfrm>
+            <a:off x="5193792" y="2057400"/>
+            <a:ext cx="2194560" cy="457200"/>
           </a:xfrm>
           <a:prstGeom prst="rect">
             <a:avLst/>
@@ -8276,27 +8634,27 @@
               </a:lnSpc>
             </a:pPr>
             <a:r>
-              <a:rPr sz="3200" b="1" i="0">
+              <a:rPr sz="2800" b="1" i="0">
                 <a:solidFill>
                   <a:srgbClr val="C15F3C"/>
                 </a:solidFill>
                 <a:latin typeface="Playfair Display"/>
               </a:rPr>
-              <a:t>②</a:t>
-            </a:r>
-          </a:p>
-        </p:txBody>
-      </p:sp>
-      <p:sp>
-        <p:nvSpPr>
-          <p:cNvPr id="12" name="TextBox 11"/>
-          <p:cNvSpPr txBox="1"/>
-          <p:nvPr/>
-        </p:nvSpPr>
-        <p:spPr>
-          <a:xfrm>
-            <a:off x="3063240" y="3154680"/>
-            <a:ext cx="1920240" cy="640080"/>
+              <a:t>③</a:t>
+            </a:r>
+          </a:p>
+        </p:txBody>
+      </p:sp>
+      <p:sp>
+        <p:nvSpPr>
+          <p:cNvPr id="16" name="TextBox 15"/>
+          <p:cNvSpPr txBox="1"/>
+          <p:nvPr/>
+        </p:nvSpPr>
+        <p:spPr>
+          <a:xfrm>
+            <a:off x="5285232" y="2606040"/>
+            <a:ext cx="2011679" cy="685800"/>
           </a:xfrm>
           <a:prstGeom prst="rect">
             <a:avLst/>
@@ -8311,31 +8669,31 @@
           <a:p>
             <a:pPr algn="ctr">
               <a:lnSpc>
-                <a:spcPct val="120000"/>
-              </a:lnSpc>
-            </a:pPr>
-            <a:r>
-              <a:rPr sz="1500" b="1" i="0">
+                <a:spcPct val="115000"/>
+              </a:lnSpc>
+            </a:pPr>
+            <a:r>
+              <a:rPr sz="1400" b="1" i="0">
                 <a:solidFill>
                   <a:srgbClr val="141413"/>
                 </a:solidFill>
                 <a:latin typeface="Playfair Display"/>
               </a:rPr>
-              <a:t>Приказ</a:t>
-            </a:r>
-          </a:p>
-        </p:txBody>
-      </p:sp>
-      <p:sp>
-        <p:nvSpPr>
-          <p:cNvPr id="13" name="TextBox 12"/>
-          <p:cNvSpPr txBox="1"/>
-          <p:nvPr/>
-        </p:nvSpPr>
-        <p:spPr>
-          <a:xfrm>
-            <a:off x="3063240" y="3840480"/>
-            <a:ext cx="1920240" cy="822960"/>
+              <a:t>Приказ о группе</a:t>
+            </a:r>
+          </a:p>
+        </p:txBody>
+      </p:sp>
+      <p:sp>
+        <p:nvSpPr>
+          <p:cNvPr id="17" name="TextBox 16"/>
+          <p:cNvSpPr txBox="1"/>
+          <p:nvPr/>
+        </p:nvSpPr>
+        <p:spPr>
+          <a:xfrm>
+            <a:off x="5303520" y="3337560"/>
+            <a:ext cx="1975104" cy="914400"/>
           </a:xfrm>
           <a:prstGeom prst="rect">
             <a:avLst/>
@@ -8350,32 +8708,32 @@
           <a:p>
             <a:pPr algn="ctr">
               <a:lnSpc>
-                <a:spcPct val="140000"/>
-              </a:lnSpc>
-            </a:pPr>
-            <a:r>
-              <a:rPr sz="1100" b="0" i="0">
+                <a:spcPct val="135000"/>
+              </a:lnSpc>
+            </a:pPr>
+            <a:r>
+              <a:rPr sz="1200" b="0" i="0">
                 <a:solidFill>
                   <a:srgbClr val="6E6A5E"/>
                 </a:solidFill>
                 <a:latin typeface="PT Sans"/>
               </a:rPr>
-              <a:t>одна строка
-об ответственном</a:t>
-            </a:r>
-          </a:p>
-        </p:txBody>
-      </p:sp>
-      <p:sp>
-        <p:nvSpPr>
-          <p:cNvPr id="14" name="Rounded Rectangle 13"/>
+              <a:t>пять фамилий
+срок 30 дней</a:t>
+            </a:r>
+          </a:p>
+        </p:txBody>
+      </p:sp>
+      <p:sp>
+        <p:nvSpPr>
+          <p:cNvPr id="18" name="Rounded Rectangle 17"/>
           <p:cNvSpPr/>
           <p:nvPr/>
         </p:nvSpPr>
         <p:spPr>
           <a:xfrm>
-            <a:off x="5193792" y="2286000"/>
-            <a:ext cx="2194560" cy="2468880"/>
+            <a:off x="7461504" y="1920240"/>
+            <a:ext cx="2194560" cy="2606040"/>
           </a:xfrm>
           <a:prstGeom prst="roundRect">
             <a:avLst>
@@ -8413,14 +8771,14 @@
       </p:sp>
       <p:sp>
         <p:nvSpPr>
-          <p:cNvPr id="15" name="TextBox 14"/>
-          <p:cNvSpPr txBox="1"/>
-          <p:nvPr/>
-        </p:nvSpPr>
-        <p:spPr>
-          <a:xfrm>
-            <a:off x="5193792" y="2468880"/>
-            <a:ext cx="2194560" cy="548640"/>
+          <p:cNvPr id="19" name="TextBox 18"/>
+          <p:cNvSpPr txBox="1"/>
+          <p:nvPr/>
+        </p:nvSpPr>
+        <p:spPr>
+          <a:xfrm>
+            <a:off x="7461504" y="2057400"/>
+            <a:ext cx="2194560" cy="457200"/>
           </a:xfrm>
           <a:prstGeom prst="rect">
             <a:avLst/>
@@ -8439,27 +8797,27 @@
               </a:lnSpc>
             </a:pPr>
             <a:r>
-              <a:rPr sz="3200" b="1" i="0">
+              <a:rPr sz="2800" b="1" i="0">
                 <a:solidFill>
                   <a:srgbClr val="C15F3C"/>
                 </a:solidFill>
                 <a:latin typeface="Playfair Display"/>
               </a:rPr>
-              <a:t>③</a:t>
-            </a:r>
-          </a:p>
-        </p:txBody>
-      </p:sp>
-      <p:sp>
-        <p:nvSpPr>
-          <p:cNvPr id="16" name="TextBox 15"/>
-          <p:cNvSpPr txBox="1"/>
-          <p:nvPr/>
-        </p:nvSpPr>
-        <p:spPr>
-          <a:xfrm>
-            <a:off x="5330952" y="3154680"/>
-            <a:ext cx="1920240" cy="640080"/>
+              <a:t>④</a:t>
+            </a:r>
+          </a:p>
+        </p:txBody>
+      </p:sp>
+      <p:sp>
+        <p:nvSpPr>
+          <p:cNvPr id="20" name="TextBox 19"/>
+          <p:cNvSpPr txBox="1"/>
+          <p:nvPr/>
+        </p:nvSpPr>
+        <p:spPr>
+          <a:xfrm>
+            <a:off x="7552944" y="2606040"/>
+            <a:ext cx="2011679" cy="685800"/>
           </a:xfrm>
           <a:prstGeom prst="rect">
             <a:avLst/>
@@ -8474,31 +8832,31 @@
           <a:p>
             <a:pPr algn="ctr">
               <a:lnSpc>
-                <a:spcPct val="120000"/>
-              </a:lnSpc>
-            </a:pPr>
-            <a:r>
-              <a:rPr sz="1500" b="1" i="0">
+                <a:spcPct val="115000"/>
+              </a:lnSpc>
+            </a:pPr>
+            <a:r>
+              <a:rPr sz="1400" b="1" i="0">
                 <a:solidFill>
                   <a:srgbClr val="141413"/>
                 </a:solidFill>
                 <a:latin typeface="Playfair Display"/>
               </a:rPr>
-              <a:t>Обучение смены</a:t>
-            </a:r>
-          </a:p>
-        </p:txBody>
-      </p:sp>
-      <p:sp>
-        <p:nvSpPr>
-          <p:cNvPr id="17" name="TextBox 16"/>
-          <p:cNvSpPr txBox="1"/>
-          <p:nvPr/>
-        </p:nvSpPr>
-        <p:spPr>
-          <a:xfrm>
-            <a:off x="5330952" y="3840480"/>
-            <a:ext cx="1920240" cy="822960"/>
+              <a:t>Письмо учредителю</a:t>
+            </a:r>
+          </a:p>
+        </p:txBody>
+      </p:sp>
+      <p:sp>
+        <p:nvSpPr>
+          <p:cNvPr id="21" name="TextBox 20"/>
+          <p:cNvSpPr txBox="1"/>
+          <p:nvPr/>
+        </p:nvSpPr>
+        <p:spPr>
+          <a:xfrm>
+            <a:off x="7571232" y="3337560"/>
+            <a:ext cx="1975104" cy="914400"/>
           </a:xfrm>
           <a:prstGeom prst="rect">
             <a:avLst/>
@@ -8513,181 +8871,18 @@
           <a:p>
             <a:pPr algn="ctr">
               <a:lnSpc>
-                <a:spcPct val="140000"/>
-              </a:lnSpc>
-            </a:pPr>
-            <a:r>
-              <a:rPr sz="1100" b="0" i="0">
+                <a:spcPct val="135000"/>
+              </a:lnSpc>
+            </a:pPr>
+            <a:r>
+              <a:rPr sz="1200" b="0" i="0">
                 <a:solidFill>
                   <a:srgbClr val="6E6A5E"/>
                 </a:solidFill>
                 <a:latin typeface="PT Sans"/>
               </a:rPr>
-              <a:t>15 минут
-показать журнал</a:t>
-            </a:r>
-          </a:p>
-        </p:txBody>
-      </p:sp>
-      <p:sp>
-        <p:nvSpPr>
-          <p:cNvPr id="18" name="Rounded Rectangle 17"/>
-          <p:cNvSpPr/>
-          <p:nvPr/>
-        </p:nvSpPr>
-        <p:spPr>
-          <a:xfrm>
-            <a:off x="7461504" y="2286000"/>
-            <a:ext cx="2194560" cy="2468880"/>
-          </a:xfrm>
-          <a:prstGeom prst="roundRect">
-            <a:avLst>
-              <a:gd name="adj" fmla="val 14000"/>
-            </a:avLst>
-          </a:prstGeom>
-          <a:solidFill>
-            <a:srgbClr val="C15F3C"/>
-          </a:solidFill>
-          <a:ln>
-            <a:noFill/>
-          </a:ln>
-        </p:spPr>
-        <p:style>
-          <a:lnRef idx="1">
-            <a:schemeClr val="accent1"/>
-          </a:lnRef>
-          <a:fillRef idx="3">
-            <a:schemeClr val="accent1"/>
-          </a:fillRef>
-          <a:effectRef idx="2">
-            <a:schemeClr val="accent1"/>
-          </a:effectRef>
-          <a:fontRef idx="minor">
-            <a:schemeClr val="lt1"/>
-          </a:fontRef>
-        </p:style>
-        <p:txBody>
-          <a:bodyPr rtlCol="0" anchor="ctr"/>
-          <a:lstStyle/>
-          <a:p>
-            <a:pPr algn="ctr"/>
-          </a:p>
-        </p:txBody>
-      </p:sp>
-      <p:sp>
-        <p:nvSpPr>
-          <p:cNvPr id="19" name="TextBox 18"/>
-          <p:cNvSpPr txBox="1"/>
-          <p:nvPr/>
-        </p:nvSpPr>
-        <p:spPr>
-          <a:xfrm>
-            <a:off x="7461504" y="2468880"/>
-            <a:ext cx="2194560" cy="548640"/>
-          </a:xfrm>
-          <a:prstGeom prst="rect">
-            <a:avLst/>
-          </a:prstGeom>
-          <a:noFill/>
-        </p:spPr>
-        <p:txBody>
-          <a:bodyPr wrap="square" anchor="t" lIns="0" rIns="0" tIns="0" bIns="0">
-            <a:spAutoFit/>
-          </a:bodyPr>
-          <a:lstStyle/>
-          <a:p>
-            <a:pPr algn="ctr">
-              <a:lnSpc>
-                <a:spcPct val="130000"/>
-              </a:lnSpc>
-            </a:pPr>
-            <a:r>
-              <a:rPr sz="3200" b="1" i="0">
-                <a:solidFill>
-                  <a:srgbClr val="FAF9F5"/>
-                </a:solidFill>
-                <a:latin typeface="Playfair Display"/>
-              </a:rPr>
-              <a:t>④</a:t>
-            </a:r>
-          </a:p>
-        </p:txBody>
-      </p:sp>
-      <p:sp>
-        <p:nvSpPr>
-          <p:cNvPr id="20" name="TextBox 19"/>
-          <p:cNvSpPr txBox="1"/>
-          <p:nvPr/>
-        </p:nvSpPr>
-        <p:spPr>
-          <a:xfrm>
-            <a:off x="7598664" y="3154680"/>
-            <a:ext cx="1920240" cy="640080"/>
-          </a:xfrm>
-          <a:prstGeom prst="rect">
-            <a:avLst/>
-          </a:prstGeom>
-          <a:noFill/>
-        </p:spPr>
-        <p:txBody>
-          <a:bodyPr wrap="square" anchor="t" lIns="0" rIns="0" tIns="0" bIns="0">
-            <a:spAutoFit/>
-          </a:bodyPr>
-          <a:lstStyle/>
-          <a:p>
-            <a:pPr algn="ctr">
-              <a:lnSpc>
-                <a:spcPct val="120000"/>
-              </a:lnSpc>
-            </a:pPr>
-            <a:r>
-              <a:rPr sz="1500" b="1" i="0">
-                <a:solidFill>
-                  <a:srgbClr val="FAF9F5"/>
-                </a:solidFill>
-                <a:latin typeface="Playfair Display"/>
-              </a:rPr>
-              <a:t>Пилот</a:t>
-            </a:r>
-          </a:p>
-        </p:txBody>
-      </p:sp>
-      <p:sp>
-        <p:nvSpPr>
-          <p:cNvPr id="21" name="TextBox 20"/>
-          <p:cNvSpPr txBox="1"/>
-          <p:nvPr/>
-        </p:nvSpPr>
-        <p:spPr>
-          <a:xfrm>
-            <a:off x="7598664" y="3840480"/>
-            <a:ext cx="1920240" cy="822960"/>
-          </a:xfrm>
-          <a:prstGeom prst="rect">
-            <a:avLst/>
-          </a:prstGeom>
-          <a:noFill/>
-        </p:spPr>
-        <p:txBody>
-          <a:bodyPr wrap="square" anchor="t" lIns="0" rIns="0" tIns="0" bIns="0">
-            <a:spAutoFit/>
-          </a:bodyPr>
-          <a:lstStyle/>
-          <a:p>
-            <a:pPr algn="ctr">
-              <a:lnSpc>
-                <a:spcPct val="140000"/>
-              </a:lnSpc>
-            </a:pPr>
-            <a:r>
-              <a:rPr sz="1100" b="0" i="0">
-                <a:solidFill>
-                  <a:srgbClr val="FAF9F5"/>
-                </a:solidFill>
-                <a:latin typeface="PT Sans"/>
-              </a:rPr>
-              <a:t>90 дней
-одно отделение</a:t>
+              <a:t>одна страница
+уведомить</a:t>
             </a:r>
           </a:p>
         </p:txBody>
@@ -8700,8 +8895,8 @@
         </p:nvSpPr>
         <p:spPr>
           <a:xfrm>
-            <a:off x="9729216" y="2286000"/>
-            <a:ext cx="2194560" cy="2468880"/>
+            <a:off x="9729216" y="1920240"/>
+            <a:ext cx="2194560" cy="2606040"/>
           </a:xfrm>
           <a:prstGeom prst="roundRect">
             <a:avLst>
@@ -8745,8 +8940,8 @@
         </p:nvSpPr>
         <p:spPr>
           <a:xfrm>
-            <a:off x="9729216" y="2468880"/>
-            <a:ext cx="2194560" cy="548640"/>
+            <a:off x="9729216" y="2057400"/>
+            <a:ext cx="2194560" cy="457200"/>
           </a:xfrm>
           <a:prstGeom prst="rect">
             <a:avLst/>
@@ -8765,7 +8960,7 @@
               </a:lnSpc>
             </a:pPr>
             <a:r>
-              <a:rPr sz="3200" b="1" i="0">
+              <a:rPr sz="2800" b="1" i="0">
                 <a:solidFill>
                   <a:srgbClr val="C15F3C"/>
                 </a:solidFill>
@@ -8784,8 +8979,8 @@
         </p:nvSpPr>
         <p:spPr>
           <a:xfrm>
-            <a:off x="9866376" y="3154680"/>
-            <a:ext cx="1920240" cy="640080"/>
+            <a:off x="9820656" y="2606040"/>
+            <a:ext cx="2011679" cy="685800"/>
           </a:xfrm>
           <a:prstGeom prst="rect">
             <a:avLst/>
@@ -8800,17 +8995,17 @@
           <a:p>
             <a:pPr algn="ctr">
               <a:lnSpc>
-                <a:spcPct val="120000"/>
-              </a:lnSpc>
-            </a:pPr>
-            <a:r>
-              <a:rPr sz="1500" b="1" i="0">
+                <a:spcPct val="115000"/>
+              </a:lnSpc>
+            </a:pPr>
+            <a:r>
+              <a:rPr sz="1400" b="1" i="0">
                 <a:solidFill>
                   <a:srgbClr val="141413"/>
                 </a:solidFill>
                 <a:latin typeface="Playfair Display"/>
               </a:rPr>
-              <a:t>Решение о масштабе</a:t>
+              <a:t>Точка пилота</a:t>
             </a:r>
           </a:p>
         </p:txBody>
@@ -8823,8 +9018,8 @@
         </p:nvSpPr>
         <p:spPr>
           <a:xfrm>
-            <a:off x="9866376" y="3840480"/>
-            <a:ext cx="1920240" cy="822960"/>
+            <a:off x="9838944" y="3337560"/>
+            <a:ext cx="1975104" cy="914400"/>
           </a:xfrm>
           <a:prstGeom prst="rect">
             <a:avLst/>
@@ -8839,18 +9034,18 @@
           <a:p>
             <a:pPr algn="ctr">
               <a:lnSpc>
-                <a:spcPct val="140000"/>
-              </a:lnSpc>
-            </a:pPr>
-            <a:r>
-              <a:rPr sz="1100" b="0" i="0">
+                <a:spcPct val="135000"/>
+              </a:lnSpc>
+            </a:pPr>
+            <a:r>
+              <a:rPr sz="1200" b="0" i="0">
                 <a:solidFill>
                   <a:srgbClr val="6E6A5E"/>
                 </a:solidFill>
                 <a:latin typeface="PT Sans"/>
               </a:rPr>
-              <a:t>с письмом
-учредителю</a:t>
+              <a:t>20–35 жителей
+один обед</a:t>
             </a:r>
           </a:p>
         </p:txBody>
@@ -8863,8 +9058,8 @@
         </p:nvSpPr>
         <p:spPr>
           <a:xfrm>
-            <a:off x="658368" y="5029200"/>
-            <a:ext cx="10881360" cy="1097280"/>
+            <a:off x="658368" y="4754880"/>
+            <a:ext cx="10881360" cy="1371600"/>
           </a:xfrm>
           <a:prstGeom prst="roundRect">
             <a:avLst>
@@ -8908,7 +9103,46 @@
         </p:nvSpPr>
         <p:spPr>
           <a:xfrm>
-            <a:off x="868680" y="5166360"/>
+            <a:off x="868680" y="4892040"/>
+            <a:ext cx="10515600" cy="320040"/>
+          </a:xfrm>
+          <a:prstGeom prst="rect">
+            <a:avLst/>
+          </a:prstGeom>
+          <a:noFill/>
+        </p:spPr>
+        <p:txBody>
+          <a:bodyPr wrap="square" anchor="t" lIns="0" rIns="0" tIns="0" bIns="0">
+            <a:spAutoFit/>
+          </a:bodyPr>
+          <a:lstStyle/>
+          <a:p>
+            <a:pPr algn="l">
+              <a:lnSpc>
+                <a:spcPct val="130000"/>
+              </a:lnSpc>
+            </a:pPr>
+            <a:r>
+              <a:rPr sz="1000" b="1" i="0">
+                <a:solidFill>
+                  <a:srgbClr val="B8552F"/>
+                </a:solidFill>
+                <a:latin typeface="PT Sans"/>
+              </a:rPr>
+              <a:t>В ПОНЕДЕЛЬНИК НЕ ДЕЛАТЬ</a:t>
+            </a:r>
+          </a:p>
+        </p:txBody>
+      </p:sp>
+      <p:sp>
+        <p:nvSpPr>
+          <p:cNvPr id="28" name="TextBox 27"/>
+          <p:cNvSpPr txBox="1"/>
+          <p:nvPr/>
+        </p:nvSpPr>
+        <p:spPr>
+          <a:xfrm>
+            <a:off x="868680" y="5212080"/>
             <a:ext cx="10515600" cy="365760"/>
           </a:xfrm>
           <a:prstGeom prst="rect">
@@ -8928,98 +9162,98 @@
               </a:lnSpc>
             </a:pPr>
             <a:r>
-              <a:rPr sz="1000" b="1" i="0">
+              <a:rPr sz="1400" b="0" i="0">
+                <a:solidFill>
+                  <a:srgbClr val="141413"/>
+                </a:solidFill>
+                <a:latin typeface="PT Sans"/>
+              </a:rPr>
+              <a:t>Не выбирать модель М1–М5. Не менять меню. Не выпускать пресс-релиз.</a:t>
+            </a:r>
+          </a:p>
+        </p:txBody>
+      </p:sp>
+      <p:sp>
+        <p:nvSpPr>
+          <p:cNvPr id="29" name="TextBox 28"/>
+          <p:cNvSpPr txBox="1"/>
+          <p:nvPr/>
+        </p:nvSpPr>
+        <p:spPr>
+          <a:xfrm>
+            <a:off x="868680" y="5623560"/>
+            <a:ext cx="10515600" cy="365760"/>
+          </a:xfrm>
+          <a:prstGeom prst="rect">
+            <a:avLst/>
+          </a:prstGeom>
+          <a:noFill/>
+        </p:spPr>
+        <p:txBody>
+          <a:bodyPr wrap="square" anchor="t" lIns="0" rIns="0" tIns="0" bIns="0">
+            <a:spAutoFit/>
+          </a:bodyPr>
+          <a:lstStyle/>
+          <a:p>
+            <a:pPr algn="l">
+              <a:lnSpc>
+                <a:spcPct val="130000"/>
+              </a:lnSpc>
+            </a:pPr>
+            <a:r>
+              <a:rPr sz="1400" b="0" i="1">
                 <a:solidFill>
                   <a:srgbClr val="B8552F"/>
                 </a:solidFill>
+                <a:latin typeface="Playfair Display"/>
+              </a:rPr>
+              <a:t>Через семь дней: сырьевая строка, замер запущен, приказ, письмо, отделение.</a:t>
+            </a:r>
+          </a:p>
+        </p:txBody>
+      </p:sp>
+      <p:sp>
+        <p:nvSpPr>
+          <p:cNvPr id="30" name="TextBox 29"/>
+          <p:cNvSpPr txBox="1"/>
+          <p:nvPr/>
+        </p:nvSpPr>
+        <p:spPr>
+          <a:xfrm>
+            <a:off x="658368" y="6446520"/>
+            <a:ext cx="10241280" cy="228600"/>
+          </a:xfrm>
+          <a:prstGeom prst="rect">
+            <a:avLst/>
+          </a:prstGeom>
+          <a:noFill/>
+        </p:spPr>
+        <p:txBody>
+          <a:bodyPr wrap="square" anchor="t" lIns="0" rIns="0" tIns="0" bIns="0">
+            <a:spAutoFit/>
+          </a:bodyPr>
+          <a:lstStyle/>
+          <a:p>
+            <a:pPr algn="l">
+              <a:lnSpc>
+                <a:spcPct val="130000"/>
+              </a:lnSpc>
+            </a:pPr>
+            <a:r>
+              <a:rPr sz="900" b="0" i="0">
+                <a:solidFill>
+                  <a:srgbClr val="87867F"/>
+                </a:solidFill>
                 <a:latin typeface="PT Sans"/>
               </a:rPr>
-              <a:t>ПЯТЬ ИЗМЕРЯЕМЫХ ПОКАЗАТЕЛЕЙ</a:t>
-            </a:r>
-          </a:p>
-        </p:txBody>
-      </p:sp>
-      <p:sp>
-        <p:nvSpPr>
-          <p:cNvPr id="28" name="TextBox 27"/>
-          <p:cNvSpPr txBox="1"/>
-          <p:nvPr/>
-        </p:nvSpPr>
-        <p:spPr>
-          <a:xfrm>
-            <a:off x="868680" y="5440680"/>
-            <a:ext cx="10515600" cy="640080"/>
-          </a:xfrm>
-          <a:prstGeom prst="rect">
-            <a:avLst/>
-          </a:prstGeom>
-          <a:noFill/>
-        </p:spPr>
-        <p:txBody>
-          <a:bodyPr wrap="square" anchor="t" lIns="0" rIns="0" tIns="0" bIns="0">
-            <a:spAutoFit/>
-          </a:bodyPr>
-          <a:lstStyle/>
-          <a:p>
-            <a:pPr algn="l">
-              <a:lnSpc>
-                <a:spcPct val="140000"/>
-              </a:lnSpc>
-            </a:pPr>
-            <a:r>
-              <a:rPr sz="1100" b="0" i="0">
-                <a:solidFill>
-                  <a:srgbClr val="141413"/>
-                </a:solidFill>
-                <a:latin typeface="PT Sans"/>
-              </a:rPr>
-              <a:t>① пищевая карта заполнена   ② доля приёмов с реальным выбором   ③ исполненные заказы   ④ отказы/замены/отходы   ⑤ события риска</a:t>
-            </a:r>
-          </a:p>
-        </p:txBody>
-      </p:sp>
-      <p:sp>
-        <p:nvSpPr>
-          <p:cNvPr id="29" name="TextBox 28"/>
-          <p:cNvSpPr txBox="1"/>
-          <p:nvPr/>
-        </p:nvSpPr>
-        <p:spPr>
-          <a:xfrm>
-            <a:off x="868680" y="5806440"/>
-            <a:ext cx="10515600" cy="274320"/>
-          </a:xfrm>
-          <a:prstGeom prst="rect">
-            <a:avLst/>
-          </a:prstGeom>
-          <a:noFill/>
-        </p:spPr>
-        <p:txBody>
-          <a:bodyPr wrap="square" anchor="t" lIns="0" rIns="0" tIns="0" bIns="0">
-            <a:spAutoFit/>
-          </a:bodyPr>
-          <a:lstStyle/>
-          <a:p>
-            <a:pPr algn="l">
-              <a:lnSpc>
-                <a:spcPct val="130000"/>
-              </a:lnSpc>
-            </a:pPr>
-            <a:r>
-              <a:rPr sz="1200" b="1" i="1">
-                <a:solidFill>
-                  <a:srgbClr val="B8552F"/>
-                </a:solidFill>
-                <a:latin typeface="Playfair Display"/>
-              </a:rPr>
-              <a:t>Процент выбравших — не KPI.</a:t>
-            </a:r>
-          </a:p>
-        </p:txBody>
-      </p:sp>
-      <p:sp>
-        <p:nvSpPr>
-          <p:cNvPr id="30" name="TextBox 29"/>
+              <a:t>Литературная редакция · раздел 4.5</a:t>
+            </a:r>
+          </a:p>
+        </p:txBody>
+      </p:sp>
+      <p:sp>
+        <p:nvSpPr>
+          <p:cNvPr id="31" name="TextBox 30"/>
           <p:cNvSpPr txBox="1"/>
           <p:nvPr/>
         </p:nvSpPr>
@@ -10103,6 +10337,45 @@
         </p:nvSpPr>
         <p:spPr>
           <a:xfrm>
+            <a:off x="658368" y="6446520"/>
+            <a:ext cx="10241280" cy="228600"/>
+          </a:xfrm>
+          <a:prstGeom prst="rect">
+            <a:avLst/>
+          </a:prstGeom>
+          <a:noFill/>
+        </p:spPr>
+        <p:txBody>
+          <a:bodyPr wrap="square" anchor="t" lIns="0" rIns="0" tIns="0" bIns="0">
+            <a:spAutoFit/>
+          </a:bodyPr>
+          <a:lstStyle/>
+          <a:p>
+            <a:pPr algn="l">
+              <a:lnSpc>
+                <a:spcPct val="130000"/>
+              </a:lnSpc>
+            </a:pPr>
+            <a:r>
+              <a:rPr sz="900" b="0" i="0">
+                <a:solidFill>
+                  <a:srgbClr val="87867F"/>
+                </a:solidFill>
+                <a:latin typeface="PT Sans"/>
+              </a:rPr>
+              <a:t>Литературная редакция · разделы 17, 22</a:t>
+            </a:r>
+          </a:p>
+        </p:txBody>
+      </p:sp>
+      <p:sp>
+        <p:nvSpPr>
+          <p:cNvPr id="28" name="TextBox 27"/>
+          <p:cNvSpPr txBox="1"/>
+          <p:nvPr/>
+        </p:nvSpPr>
+        <p:spPr>
+          <a:xfrm>
             <a:off x="11155680" y="6446520"/>
             <a:ext cx="640080" cy="228600"/>
           </a:xfrm>
@@ -10810,6 +11083,45 @@
         </p:nvSpPr>
         <p:spPr>
           <a:xfrm>
+            <a:off x="658368" y="6446520"/>
+            <a:ext cx="10241280" cy="228600"/>
+          </a:xfrm>
+          <a:prstGeom prst="rect">
+            <a:avLst/>
+          </a:prstGeom>
+          <a:noFill/>
+        </p:spPr>
+        <p:txBody>
+          <a:bodyPr wrap="square" anchor="t" lIns="0" rIns="0" tIns="0" bIns="0">
+            <a:spAutoFit/>
+          </a:bodyPr>
+          <a:lstStyle/>
+          <a:p>
+            <a:pPr algn="l">
+              <a:lnSpc>
+                <a:spcPct val="130000"/>
+              </a:lnSpc>
+            </a:pPr>
+            <a:r>
+              <a:rPr sz="900" b="0" i="0">
+                <a:solidFill>
+                  <a:srgbClr val="87867F"/>
+                </a:solidFill>
+                <a:latin typeface="PT Sans"/>
+              </a:rPr>
+              <a:t>Литературная редакция · раздел 18</a:t>
+            </a:r>
+          </a:p>
+        </p:txBody>
+      </p:sp>
+      <p:sp>
+        <p:nvSpPr>
+          <p:cNvPr id="19" name="TextBox 18"/>
+          <p:cNvSpPr txBox="1"/>
+          <p:nvPr/>
+        </p:nvSpPr>
+        <p:spPr>
+          <a:xfrm>
             <a:off x="11155680" y="6446520"/>
             <a:ext cx="640080" cy="228600"/>
           </a:xfrm>
@@ -11308,7 +11620,7 @@
         </p:nvSpPr>
         <p:spPr>
           <a:xfrm>
-            <a:off x="658368" y="5029200"/>
+            <a:off x="658368" y="4526280"/>
             <a:ext cx="914400" cy="36576"/>
           </a:xfrm>
           <a:prstGeom prst="rect">
@@ -11351,27 +11663,27 @@
         </p:nvSpPr>
         <p:spPr>
           <a:xfrm>
-            <a:off x="658368" y="5212080"/>
-            <a:ext cx="10972800" cy="548640"/>
-          </a:xfrm>
-          <a:prstGeom prst="rect">
-            <a:avLst/>
-          </a:prstGeom>
-          <a:noFill/>
-        </p:spPr>
-        <p:txBody>
-          <a:bodyPr wrap="square" anchor="t" lIns="0" rIns="0" tIns="0" bIns="0">
-            <a:spAutoFit/>
-          </a:bodyPr>
-          <a:lstStyle/>
-          <a:p>
-            <a:pPr algn="l">
-              <a:lnSpc>
-                <a:spcPct val="130000"/>
-              </a:lnSpc>
-            </a:pPr>
-            <a:r>
-              <a:rPr sz="2200" b="1" i="0">
+            <a:off x="658368" y="4709160"/>
+            <a:ext cx="10972800" cy="365760"/>
+          </a:xfrm>
+          <a:prstGeom prst="rect">
+            <a:avLst/>
+          </a:prstGeom>
+          <a:noFill/>
+        </p:spPr>
+        <p:txBody>
+          <a:bodyPr wrap="square" anchor="t" lIns="0" rIns="0" tIns="0" bIns="0">
+            <a:spAutoFit/>
+          </a:bodyPr>
+          <a:lstStyle/>
+          <a:p>
+            <a:pPr algn="l">
+              <a:lnSpc>
+                <a:spcPct val="130000"/>
+              </a:lnSpc>
+            </a:pPr>
+            <a:r>
+              <a:rPr sz="2000" b="1" i="0">
                 <a:solidFill>
                   <a:srgbClr val="FAF9F5"/>
                 </a:solidFill>
@@ -11390,7 +11702,46 @@
         </p:nvSpPr>
         <p:spPr>
           <a:xfrm>
-            <a:off x="658368" y="5852160"/>
+            <a:off x="658368" y="5120640"/>
+            <a:ext cx="10972800" cy="365760"/>
+          </a:xfrm>
+          <a:prstGeom prst="rect">
+            <a:avLst/>
+          </a:prstGeom>
+          <a:noFill/>
+        </p:spPr>
+        <p:txBody>
+          <a:bodyPr wrap="square" anchor="t" lIns="0" rIns="0" tIns="0" bIns="0">
+            <a:spAutoFit/>
+          </a:bodyPr>
+          <a:lstStyle/>
+          <a:p>
+            <a:pPr algn="l">
+              <a:lnSpc>
+                <a:spcPct val="130000"/>
+              </a:lnSpc>
+            </a:pPr>
+            <a:r>
+              <a:rPr sz="1600" b="0" i="1">
+                <a:solidFill>
+                  <a:srgbClr val="B7AFA0"/>
+                </a:solidFill>
+                <a:latin typeface="Playfair Display"/>
+              </a:rPr>
+              <a:t>Семь дней замера отделяют убеждение от знания.</a:t>
+            </a:r>
+          </a:p>
+        </p:txBody>
+      </p:sp>
+      <p:sp>
+        <p:nvSpPr>
+          <p:cNvPr id="16" name="TextBox 15"/>
+          <p:cNvSpPr txBox="1"/>
+          <p:nvPr/>
+        </p:nvSpPr>
+        <p:spPr>
+          <a:xfrm>
+            <a:off x="658368" y="5623560"/>
             <a:ext cx="10972800" cy="457200"/>
           </a:xfrm>
           <a:prstGeom prst="rect">
@@ -11410,26 +11761,65 @@
               </a:lnSpc>
             </a:pPr>
             <a:r>
-              <a:rPr sz="1800" b="0" i="1">
+              <a:rPr sz="2200" b="0" i="1">
                 <a:solidFill>
                   <a:srgbClr val="C15F3C"/>
                 </a:solidFill>
                 <a:latin typeface="Playfair Display"/>
               </a:rPr>
-              <a:t>Не внедряйте вслепую.  Измеряйте.</a:t>
-            </a:r>
-          </a:p>
-        </p:txBody>
-      </p:sp>
-      <p:sp>
-        <p:nvSpPr>
-          <p:cNvPr id="16" name="TextBox 15"/>
-          <p:cNvSpPr txBox="1"/>
-          <p:nvPr/>
-        </p:nvSpPr>
-        <p:spPr>
-          <a:xfrm>
-            <a:off x="11155680" y="6492240"/>
+              <a:t>Не «внедряйте». Измеряйте.</a:t>
+            </a:r>
+          </a:p>
+        </p:txBody>
+      </p:sp>
+      <p:sp>
+        <p:nvSpPr>
+          <p:cNvPr id="17" name="TextBox 16"/>
+          <p:cNvSpPr txBox="1"/>
+          <p:nvPr/>
+        </p:nvSpPr>
+        <p:spPr>
+          <a:xfrm>
+            <a:off x="658368" y="6446520"/>
+            <a:ext cx="10241280" cy="228600"/>
+          </a:xfrm>
+          <a:prstGeom prst="rect">
+            <a:avLst/>
+          </a:prstGeom>
+          <a:noFill/>
+        </p:spPr>
+        <p:txBody>
+          <a:bodyPr wrap="square" anchor="t" lIns="0" rIns="0" tIns="0" bIns="0">
+            <a:spAutoFit/>
+          </a:bodyPr>
+          <a:lstStyle/>
+          <a:p>
+            <a:pPr algn="l">
+              <a:lnSpc>
+                <a:spcPct val="130000"/>
+              </a:lnSpc>
+            </a:pPr>
+            <a:r>
+              <a:rPr sz="900" b="0" i="0">
+                <a:solidFill>
+                  <a:srgbClr val="B7AFA0"/>
+                </a:solidFill>
+                <a:latin typeface="PT Sans"/>
+              </a:rPr>
+              <a:t>Литературная редакция · разделы 35, 43</a:t>
+            </a:r>
+          </a:p>
+        </p:txBody>
+      </p:sp>
+      <p:sp>
+        <p:nvSpPr>
+          <p:cNvPr id="18" name="TextBox 17"/>
+          <p:cNvSpPr txBox="1"/>
+          <p:nvPr/>
+        </p:nvSpPr>
+        <p:spPr>
+          <a:xfrm>
+            <a:off x="11155680" y="6446520"/>
             <a:ext cx="640080" cy="228600"/>
           </a:xfrm>
           <a:prstGeom prst="rect">
@@ -11569,7 +11959,7 @@
         <p:spPr>
           <a:xfrm>
             <a:off x="658368" y="868680"/>
-            <a:ext cx="10972800" cy="640080"/>
+            <a:ext cx="10972800" cy="502920"/>
           </a:xfrm>
           <a:prstGeom prst="rect">
             <a:avLst/>
@@ -11594,14 +11984,53 @@
                 </a:solidFill>
                 <a:latin typeface="Playfair Display"/>
               </a:rPr>
-              <a:t>За одним обедом — пять вещей одновременно</a:t>
-            </a:r>
-          </a:p>
-        </p:txBody>
-      </p:sp>
-      <p:sp>
-        <p:nvSpPr>
-          <p:cNvPr id="5" name="Rounded Rectangle 4"/>
+              <a:t>Один обед — пять конфликтов</a:t>
+            </a:r>
+          </a:p>
+        </p:txBody>
+      </p:sp>
+      <p:sp>
+        <p:nvSpPr>
+          <p:cNvPr id="5" name="TextBox 4"/>
+          <p:cNvSpPr txBox="1"/>
+          <p:nvPr/>
+        </p:nvSpPr>
+        <p:spPr>
+          <a:xfrm>
+            <a:off x="658368" y="1371600"/>
+            <a:ext cx="10972800" cy="320040"/>
+          </a:xfrm>
+          <a:prstGeom prst="rect">
+            <a:avLst/>
+          </a:prstGeom>
+          <a:noFill/>
+        </p:spPr>
+        <p:txBody>
+          <a:bodyPr wrap="square" anchor="t" lIns="0" rIns="0" tIns="0" bIns="0">
+            <a:spAutoFit/>
+          </a:bodyPr>
+          <a:lstStyle/>
+          <a:p>
+            <a:pPr algn="l">
+              <a:lnSpc>
+                <a:spcPct val="130000"/>
+              </a:lnSpc>
+            </a:pPr>
+            <a:r>
+              <a:rPr sz="1600" b="0" i="1">
+                <a:solidFill>
+                  <a:srgbClr val="6E6A5E"/>
+                </a:solidFill>
+                <a:latin typeface="Playfair Display"/>
+              </a:rPr>
+              <a:t>Учебный кейс. Персонажи вымышлены. Система одна.</a:t>
+            </a:r>
+          </a:p>
+        </p:txBody>
+      </p:sp>
+      <p:sp>
+        <p:nvSpPr>
+          <p:cNvPr id="6" name="Rounded Rectangle 5"/>
           <p:cNvSpPr/>
           <p:nvPr/>
         </p:nvSpPr>
@@ -11646,7 +12075,7 @@
       </p:sp>
       <p:sp>
         <p:nvSpPr>
-          <p:cNvPr id="6" name="TextBox 5"/>
+          <p:cNvPr id="7" name="TextBox 6"/>
           <p:cNvSpPr txBox="1"/>
           <p:nvPr/>
         </p:nvSpPr>
@@ -11685,14 +12114,14 @@
       </p:sp>
       <p:sp>
         <p:nvSpPr>
-          <p:cNvPr id="7" name="TextBox 6"/>
-          <p:cNvSpPr txBox="1"/>
-          <p:nvPr/>
-        </p:nvSpPr>
-        <p:spPr>
-          <a:xfrm>
-            <a:off x="795528" y="2834640"/>
-            <a:ext cx="1920240" cy="640080"/>
+          <p:cNvPr id="8" name="TextBox 7"/>
+          <p:cNvSpPr txBox="1"/>
+          <p:nvPr/>
+        </p:nvSpPr>
+        <p:spPr>
+          <a:xfrm>
+            <a:off x="749808" y="2788920"/>
+            <a:ext cx="2011679" cy="777240"/>
           </a:xfrm>
           <a:prstGeom prst="rect">
             <a:avLst/>
@@ -11707,31 +12136,31 @@
           <a:p>
             <a:pPr algn="ctr">
               <a:lnSpc>
-                <a:spcPct val="120000"/>
-              </a:lnSpc>
-            </a:pPr>
-            <a:r>
-              <a:rPr sz="1500" b="1" i="0">
+                <a:spcPct val="115000"/>
+              </a:lnSpc>
+            </a:pPr>
+            <a:r>
+              <a:rPr sz="1400" b="1" i="0">
                 <a:solidFill>
                   <a:srgbClr val="141413"/>
                 </a:solidFill>
                 <a:latin typeface="Playfair Display"/>
               </a:rPr>
-              <a:t>Безопасность</a:t>
-            </a:r>
-          </a:p>
-        </p:txBody>
-      </p:sp>
-      <p:sp>
-        <p:nvSpPr>
-          <p:cNvPr id="8" name="TextBox 7"/>
-          <p:cNvSpPr txBox="1"/>
-          <p:nvPr/>
-        </p:nvSpPr>
-        <p:spPr>
-          <a:xfrm>
-            <a:off x="795528" y="3657600"/>
-            <a:ext cx="1920240" cy="822960"/>
+              <a:t>Очередь и помощь</a:t>
+            </a:r>
+          </a:p>
+        </p:txBody>
+      </p:sp>
+      <p:sp>
+        <p:nvSpPr>
+          <p:cNvPr id="9" name="TextBox 8"/>
+          <p:cNvSpPr txBox="1"/>
+          <p:nvPr/>
+        </p:nvSpPr>
+        <p:spPr>
+          <a:xfrm>
+            <a:off x="768096" y="3611880"/>
+            <a:ext cx="1975104" cy="777240"/>
           </a:xfrm>
           <a:prstGeom prst="rect">
             <a:avLst/>
@@ -11746,24 +12175,24 @@
           <a:p>
             <a:pPr algn="ctr">
               <a:lnSpc>
-                <a:spcPct val="135000"/>
-              </a:lnSpc>
-            </a:pPr>
-            <a:r>
-              <a:rPr sz="1100" b="0" i="0">
+                <a:spcPct val="130000"/>
+              </a:lnSpc>
+            </a:pPr>
+            <a:r>
+              <a:rPr sz="1200" b="0" i="0">
                 <a:solidFill>
                   <a:srgbClr val="6E6A5E"/>
                 </a:solidFill>
                 <a:latin typeface="PT Sans"/>
               </a:rPr>
-              <a:t>текстуры, лекарства, риск аспирации</a:t>
-            </a:r>
-          </a:p>
-        </p:txBody>
-      </p:sp>
-      <p:sp>
-        <p:nvSpPr>
-          <p:cNvPr id="9" name="Rounded Rectangle 8"/>
+              <a:t>кормят холодным, на скорость</a:t>
+            </a:r>
+          </a:p>
+        </p:txBody>
+      </p:sp>
+      <p:sp>
+        <p:nvSpPr>
+          <p:cNvPr id="10" name="Rounded Rectangle 9"/>
           <p:cNvSpPr/>
           <p:nvPr/>
         </p:nvSpPr>
@@ -11808,7 +12237,7 @@
       </p:sp>
       <p:sp>
         <p:nvSpPr>
-          <p:cNvPr id="10" name="TextBox 9"/>
+          <p:cNvPr id="11" name="TextBox 10"/>
           <p:cNvSpPr txBox="1"/>
           <p:nvPr/>
         </p:nvSpPr>
@@ -11847,14 +12276,14 @@
       </p:sp>
       <p:sp>
         <p:nvSpPr>
-          <p:cNvPr id="11" name="TextBox 10"/>
-          <p:cNvSpPr txBox="1"/>
-          <p:nvPr/>
-        </p:nvSpPr>
-        <p:spPr>
-          <a:xfrm>
-            <a:off x="3035808" y="2834640"/>
-            <a:ext cx="1920240" cy="640080"/>
+          <p:cNvPr id="12" name="TextBox 11"/>
+          <p:cNvSpPr txBox="1"/>
+          <p:nvPr/>
+        </p:nvSpPr>
+        <p:spPr>
+          <a:xfrm>
+            <a:off x="2990088" y="2788920"/>
+            <a:ext cx="2011679" cy="777240"/>
           </a:xfrm>
           <a:prstGeom prst="rect">
             <a:avLst/>
@@ -11869,31 +12298,31 @@
           <a:p>
             <a:pPr algn="ctr">
               <a:lnSpc>
-                <a:spcPct val="120000"/>
-              </a:lnSpc>
-            </a:pPr>
-            <a:r>
-              <a:rPr sz="1500" b="1" i="0">
+                <a:spcPct val="115000"/>
+              </a:lnSpc>
+            </a:pPr>
+            <a:r>
+              <a:rPr sz="1400" b="1" i="0">
                 <a:solidFill>
                   <a:srgbClr val="141413"/>
                 </a:solidFill>
                 <a:latin typeface="Playfair Display"/>
               </a:rPr>
-              <a:t>Достоинство</a:t>
-            </a:r>
-          </a:p>
-        </p:txBody>
-      </p:sp>
-      <p:sp>
-        <p:nvSpPr>
-          <p:cNvPr id="12" name="TextBox 11"/>
-          <p:cNvSpPr txBox="1"/>
-          <p:nvPr/>
-        </p:nvSpPr>
-        <p:spPr>
-          <a:xfrm>
-            <a:off x="3035808" y="3657600"/>
-            <a:ext cx="1920240" cy="822960"/>
+              <a:t>«Не ест кашу»</a:t>
+            </a:r>
+          </a:p>
+        </p:txBody>
+      </p:sp>
+      <p:sp>
+        <p:nvSpPr>
+          <p:cNvPr id="13" name="TextBox 12"/>
+          <p:cNvSpPr txBox="1"/>
+          <p:nvPr/>
+        </p:nvSpPr>
+        <p:spPr>
+          <a:xfrm>
+            <a:off x="3008376" y="3611880"/>
+            <a:ext cx="1975104" cy="777240"/>
           </a:xfrm>
           <a:prstGeom prst="rect">
             <a:avLst/>
@@ -11908,24 +12337,24 @@
           <a:p>
             <a:pPr algn="ctr">
               <a:lnSpc>
-                <a:spcPct val="135000"/>
-              </a:lnSpc>
-            </a:pPr>
-            <a:r>
-              <a:rPr sz="1100" b="0" i="0">
+                <a:spcPct val="130000"/>
+              </a:lnSpc>
+            </a:pPr>
+            <a:r>
+              <a:rPr sz="1200" b="0" i="0">
                 <a:solidFill>
                   <a:srgbClr val="6E6A5E"/>
                 </a:solidFill>
                 <a:latin typeface="PT Sans"/>
               </a:rPr>
-              <a:t>уважение к жителю, имя на тарелке</a:t>
-            </a:r>
-          </a:p>
-        </p:txBody>
-      </p:sp>
-      <p:sp>
-        <p:nvSpPr>
-          <p:cNvPr id="13" name="Rounded Rectangle 12"/>
+              <a:t>отказ без журнала и врача</a:t>
+            </a:r>
+          </a:p>
+        </p:txBody>
+      </p:sp>
+      <p:sp>
+        <p:nvSpPr>
+          <p:cNvPr id="14" name="Rounded Rectangle 13"/>
           <p:cNvSpPr/>
           <p:nvPr/>
         </p:nvSpPr>
@@ -11970,7 +12399,7 @@
       </p:sp>
       <p:sp>
         <p:nvSpPr>
-          <p:cNvPr id="14" name="TextBox 13"/>
+          <p:cNvPr id="15" name="TextBox 14"/>
           <p:cNvSpPr txBox="1"/>
           <p:nvPr/>
         </p:nvSpPr>
@@ -12009,14 +12438,14 @@
       </p:sp>
       <p:sp>
         <p:nvSpPr>
-          <p:cNvPr id="15" name="TextBox 14"/>
-          <p:cNvSpPr txBox="1"/>
-          <p:nvPr/>
-        </p:nvSpPr>
-        <p:spPr>
-          <a:xfrm>
-            <a:off x="5276087" y="2834640"/>
-            <a:ext cx="1920240" cy="640080"/>
+          <p:cNvPr id="16" name="TextBox 15"/>
+          <p:cNvSpPr txBox="1"/>
+          <p:nvPr/>
+        </p:nvSpPr>
+        <p:spPr>
+          <a:xfrm>
+            <a:off x="5230367" y="2788920"/>
+            <a:ext cx="2011679" cy="777240"/>
           </a:xfrm>
           <a:prstGeom prst="rect">
             <a:avLst/>
@@ -12031,31 +12460,31 @@
           <a:p>
             <a:pPr algn="ctr">
               <a:lnSpc>
-                <a:spcPct val="120000"/>
-              </a:lnSpc>
-            </a:pPr>
-            <a:r>
-              <a:rPr sz="1500" b="1" i="0">
+                <a:spcPct val="115000"/>
+              </a:lnSpc>
+            </a:pPr>
+            <a:r>
+              <a:rPr sz="1400" b="1" i="0">
                 <a:solidFill>
                   <a:srgbClr val="141413"/>
                 </a:solidFill>
                 <a:latin typeface="Playfair Display"/>
               </a:rPr>
-              <a:t>Предпочтение</a:t>
-            </a:r>
-          </a:p>
-        </p:txBody>
-      </p:sp>
-      <p:sp>
-        <p:nvSpPr>
-          <p:cNvPr id="16" name="TextBox 15"/>
-          <p:cNvSpPr txBox="1"/>
-          <p:nvPr/>
-        </p:nvSpPr>
-        <p:spPr>
-          <a:xfrm>
-            <a:off x="5276087" y="3657600"/>
-            <a:ext cx="1920240" cy="822960"/>
+              <a:t>Лекарства и кофе</a:t>
+            </a:r>
+          </a:p>
+        </p:txBody>
+      </p:sp>
+      <p:sp>
+        <p:nvSpPr>
+          <p:cNvPr id="17" name="TextBox 16"/>
+          <p:cNvSpPr txBox="1"/>
+          <p:nvPr/>
+        </p:nvSpPr>
+        <p:spPr>
+          <a:xfrm>
+            <a:off x="5248655" y="3611880"/>
+            <a:ext cx="1975104" cy="777240"/>
           </a:xfrm>
           <a:prstGeom prst="rect">
             <a:avLst/>
@@ -12070,24 +12499,24 @@
           <a:p>
             <a:pPr algn="ctr">
               <a:lnSpc>
-                <a:spcPct val="135000"/>
-              </a:lnSpc>
-            </a:pPr>
-            <a:r>
-              <a:rPr sz="1100" b="0" i="0">
+                <a:spcPct val="130000"/>
+              </a:lnSpc>
+            </a:pPr>
+            <a:r>
+              <a:rPr sz="1200" b="0" i="0">
                 <a:solidFill>
                   <a:srgbClr val="6E6A5E"/>
                 </a:solidFill>
                 <a:latin typeface="PT Sans"/>
               </a:rPr>
-              <a:t>свой голос — словом, жестом, биографией</a:t>
-            </a:r>
-          </a:p>
-        </p:txBody>
-      </p:sp>
-      <p:sp>
-        <p:nvSpPr>
-          <p:cNvPr id="17" name="Rounded Rectangle 16"/>
+              <a:t>кофеин и клозапин без таблицы</a:t>
+            </a:r>
+          </a:p>
+        </p:txBody>
+      </p:sp>
+      <p:sp>
+        <p:nvSpPr>
+          <p:cNvPr id="18" name="Rounded Rectangle 17"/>
           <p:cNvSpPr/>
           <p:nvPr/>
         </p:nvSpPr>
@@ -12132,7 +12561,7 @@
       </p:sp>
       <p:sp>
         <p:nvSpPr>
-          <p:cNvPr id="18" name="TextBox 17"/>
+          <p:cNvPr id="19" name="TextBox 18"/>
           <p:cNvSpPr txBox="1"/>
           <p:nvPr/>
         </p:nvSpPr>
@@ -12171,14 +12600,14 @@
       </p:sp>
       <p:sp>
         <p:nvSpPr>
-          <p:cNvPr id="19" name="TextBox 18"/>
-          <p:cNvSpPr txBox="1"/>
-          <p:nvPr/>
-        </p:nvSpPr>
-        <p:spPr>
-          <a:xfrm>
-            <a:off x="7516368" y="2834640"/>
-            <a:ext cx="1920240" cy="640080"/>
+          <p:cNvPr id="20" name="TextBox 19"/>
+          <p:cNvSpPr txBox="1"/>
+          <p:nvPr/>
+        </p:nvSpPr>
+        <p:spPr>
+          <a:xfrm>
+            <a:off x="7470648" y="2788920"/>
+            <a:ext cx="2011679" cy="777240"/>
           </a:xfrm>
           <a:prstGeom prst="rect">
             <a:avLst/>
@@ -12193,31 +12622,31 @@
           <a:p>
             <a:pPr algn="ctr">
               <a:lnSpc>
-                <a:spcPct val="120000"/>
-              </a:lnSpc>
-            </a:pPr>
-            <a:r>
-              <a:rPr sz="1500" b="1" i="0">
+                <a:spcPct val="115000"/>
+              </a:lnSpc>
+            </a:pPr>
+            <a:r>
+              <a:rPr sz="1400" b="1" i="0">
                 <a:solidFill>
                   <a:srgbClr val="141413"/>
                 </a:solidFill>
                 <a:latin typeface="Playfair Display"/>
               </a:rPr>
-              <a:t>Возможности кухни</a:t>
-            </a:r>
-          </a:p>
-        </p:txBody>
-      </p:sp>
-      <p:sp>
-        <p:nvSpPr>
-          <p:cNvPr id="20" name="TextBox 19"/>
-          <p:cNvSpPr txBox="1"/>
-          <p:nvPr/>
-        </p:nvSpPr>
-        <p:spPr>
-          <a:xfrm>
-            <a:off x="7516368" y="3657600"/>
-            <a:ext cx="1920240" cy="822960"/>
+              <a:t>Добавка</a:t>
+            </a:r>
+          </a:p>
+        </p:txBody>
+      </p:sp>
+      <p:sp>
+        <p:nvSpPr>
+          <p:cNvPr id="21" name="TextBox 20"/>
+          <p:cNvSpPr txBox="1"/>
+          <p:nvPr/>
+        </p:nvSpPr>
+        <p:spPr>
+          <a:xfrm>
+            <a:off x="7488936" y="3611880"/>
+            <a:ext cx="1975104" cy="777240"/>
           </a:xfrm>
           <a:prstGeom prst="rect">
             <a:avLst/>
@@ -12232,24 +12661,24 @@
           <a:p>
             <a:pPr algn="ctr">
               <a:lnSpc>
-                <a:spcPct val="135000"/>
-              </a:lnSpc>
-            </a:pPr>
-            <a:r>
-              <a:rPr sz="1100" b="0" i="0">
+                <a:spcPct val="130000"/>
+              </a:lnSpc>
+            </a:pPr>
+            <a:r>
+              <a:rPr sz="1200" b="0" i="0">
                 <a:solidFill>
                   <a:srgbClr val="6E6A5E"/>
                 </a:solidFill>
                 <a:latin typeface="PT Sans"/>
               </a:rPr>
-              <a:t>что реально приготовить сегодня</a:t>
-            </a:r>
-          </a:p>
-        </p:txBody>
-      </p:sp>
-      <p:sp>
-        <p:nvSpPr>
-          <p:cNvPr id="21" name="Rounded Rectangle 20"/>
+              <a:t>«вам нельзя» — не от врача</a:t>
+            </a:r>
+          </a:p>
+        </p:txBody>
+      </p:sp>
+      <p:sp>
+        <p:nvSpPr>
+          <p:cNvPr id="22" name="Rounded Rectangle 21"/>
           <p:cNvSpPr/>
           <p:nvPr/>
         </p:nvSpPr>
@@ -12294,7 +12723,7 @@
       </p:sp>
       <p:sp>
         <p:nvSpPr>
-          <p:cNvPr id="22" name="TextBox 21"/>
+          <p:cNvPr id="23" name="TextBox 22"/>
           <p:cNvSpPr txBox="1"/>
           <p:nvPr/>
         </p:nvSpPr>
@@ -12333,14 +12762,14 @@
       </p:sp>
       <p:sp>
         <p:nvSpPr>
-          <p:cNvPr id="23" name="TextBox 22"/>
-          <p:cNvSpPr txBox="1"/>
-          <p:nvPr/>
-        </p:nvSpPr>
-        <p:spPr>
-          <a:xfrm>
-            <a:off x="9756648" y="2834640"/>
-            <a:ext cx="1920240" cy="640080"/>
+          <p:cNvPr id="24" name="TextBox 23"/>
+          <p:cNvSpPr txBox="1"/>
+          <p:nvPr/>
+        </p:nvSpPr>
+        <p:spPr>
+          <a:xfrm>
+            <a:off x="9710928" y="2788920"/>
+            <a:ext cx="2011679" cy="777240"/>
           </a:xfrm>
           <a:prstGeom prst="rect">
             <a:avLst/>
@@ -12355,31 +12784,31 @@
           <a:p>
             <a:pPr algn="ctr">
               <a:lnSpc>
-                <a:spcPct val="120000"/>
-              </a:lnSpc>
-            </a:pPr>
-            <a:r>
-              <a:rPr sz="1500" b="1" i="0">
+                <a:spcPct val="115000"/>
+              </a:lnSpc>
+            </a:pPr>
+            <a:r>
+              <a:rPr sz="1400" b="1" i="0">
                 <a:solidFill>
                   <a:srgbClr val="141413"/>
                 </a:solidFill>
                 <a:latin typeface="Playfair Display"/>
               </a:rPr>
-              <a:t>Документ проверки</a:t>
-            </a:r>
-          </a:p>
-        </p:txBody>
-      </p:sp>
-      <p:sp>
-        <p:nvSpPr>
-          <p:cNvPr id="24" name="TextBox 23"/>
-          <p:cNvSpPr txBox="1"/>
-          <p:nvPr/>
-        </p:nvSpPr>
-        <p:spPr>
-          <a:xfrm>
-            <a:off x="9756648" y="3657600"/>
-            <a:ext cx="1920240" cy="822960"/>
+              <a:t>Журналы «в порядок»</a:t>
+            </a:r>
+          </a:p>
+        </p:txBody>
+      </p:sp>
+      <p:sp>
+        <p:nvSpPr>
+          <p:cNvPr id="25" name="TextBox 24"/>
+          <p:cNvSpPr txBox="1"/>
+          <p:nvPr/>
+        </p:nvSpPr>
+        <p:spPr>
+          <a:xfrm>
+            <a:off x="9729216" y="3611880"/>
+            <a:ext cx="1975104" cy="777240"/>
           </a:xfrm>
           <a:prstGeom prst="rect">
             <a:avLst/>
@@ -12394,31 +12823,31 @@
           <a:p>
             <a:pPr algn="ctr">
               <a:lnSpc>
-                <a:spcPct val="135000"/>
-              </a:lnSpc>
-            </a:pPr>
-            <a:r>
-              <a:rPr sz="1100" b="0" i="0">
+                <a:spcPct val="130000"/>
+              </a:lnSpc>
+            </a:pPr>
+            <a:r>
+              <a:rPr sz="1200" b="0" i="0">
                 <a:solidFill>
                   <a:srgbClr val="6E6A5E"/>
                 </a:solidFill>
                 <a:latin typeface="PT Sans"/>
               </a:rPr>
-              <a:t>журнал, карта, согласование</a:t>
-            </a:r>
-          </a:p>
-        </p:txBody>
-      </p:sp>
-      <p:sp>
-        <p:nvSpPr>
-          <p:cNvPr id="25" name="TextBox 24"/>
-          <p:cNvSpPr txBox="1"/>
-          <p:nvPr/>
-        </p:nvSpPr>
-        <p:spPr>
-          <a:xfrm>
-            <a:off x="658368" y="4846320"/>
-            <a:ext cx="10972800" cy="457200"/>
+              <a:t>контроль имитируется</a:t>
+            </a:r>
+          </a:p>
+        </p:txBody>
+      </p:sp>
+      <p:sp>
+        <p:nvSpPr>
+          <p:cNvPr id="26" name="TextBox 25"/>
+          <p:cNvSpPr txBox="1"/>
+          <p:nvPr/>
+        </p:nvSpPr>
+        <p:spPr>
+          <a:xfrm>
+            <a:off x="658368" y="4754880"/>
+            <a:ext cx="10972800" cy="640080"/>
           </a:xfrm>
           <a:prstGeom prst="rect">
             <a:avLst/>
@@ -12437,20 +12866,20 @@
               </a:lnSpc>
             </a:pPr>
             <a:r>
-              <a:rPr sz="1500" b="0" i="1">
+              <a:rPr sz="1600" b="0" i="1">
                 <a:solidFill>
                   <a:srgbClr val="6E6A5E"/>
                 </a:solidFill>
                 <a:latin typeface="Playfair Display"/>
               </a:rPr>
-              <a:t>Каждое измерение — отдельный документ, отдельный участник, отдельный риск.</a:t>
-            </a:r>
-          </a:p>
-        </p:txBody>
-      </p:sp>
-      <p:sp>
-        <p:nvSpPr>
-          <p:cNvPr id="26" name="Rectangle 25"/>
+              <a:t>Ни один из пяти не требует денег, чтобы начать. Вариативность — шестой конфликт, если эти не закрыты.</a:t>
+            </a:r>
+          </a:p>
+        </p:txBody>
+      </p:sp>
+      <p:sp>
+        <p:nvSpPr>
+          <p:cNvPr id="27" name="Rectangle 26"/>
           <p:cNvSpPr/>
           <p:nvPr/>
         </p:nvSpPr>
@@ -12493,7 +12922,46 @@
       </p:sp>
       <p:sp>
         <p:nvSpPr>
-          <p:cNvPr id="27" name="TextBox 26"/>
+          <p:cNvPr id="28" name="TextBox 27"/>
+          <p:cNvSpPr txBox="1"/>
+          <p:nvPr/>
+        </p:nvSpPr>
+        <p:spPr>
+          <a:xfrm>
+            <a:off x="658368" y="6446520"/>
+            <a:ext cx="10241280" cy="228600"/>
+          </a:xfrm>
+          <a:prstGeom prst="rect">
+            <a:avLst/>
+          </a:prstGeom>
+          <a:noFill/>
+        </p:spPr>
+        <p:txBody>
+          <a:bodyPr wrap="square" anchor="t" lIns="0" rIns="0" tIns="0" bIns="0">
+            <a:spAutoFit/>
+          </a:bodyPr>
+          <a:lstStyle/>
+          <a:p>
+            <a:pPr algn="l">
+              <a:lnSpc>
+                <a:spcPct val="130000"/>
+              </a:lnSpc>
+            </a:pPr>
+            <a:r>
+              <a:rPr sz="900" b="0" i="0">
+                <a:solidFill>
+                  <a:srgbClr val="87867F"/>
+                </a:solidFill>
+                <a:latin typeface="PT Sans"/>
+              </a:rPr>
+              <a:t>Литературная редакция · раздел 5</a:t>
+            </a:r>
+          </a:p>
+        </p:txBody>
+      </p:sp>
+      <p:sp>
+        <p:nvSpPr>
+          <p:cNvPr id="29" name="TextBox 28"/>
           <p:cNvSpPr txBox="1"/>
           <p:nvPr/>
         </p:nvSpPr>
@@ -13020,6 +13488,45 @@
         </p:nvSpPr>
         <p:spPr>
           <a:xfrm>
+            <a:off x="658368" y="6446520"/>
+            <a:ext cx="10241280" cy="228600"/>
+          </a:xfrm>
+          <a:prstGeom prst="rect">
+            <a:avLst/>
+          </a:prstGeom>
+          <a:noFill/>
+        </p:spPr>
+        <p:txBody>
+          <a:bodyPr wrap="square" anchor="t" lIns="0" rIns="0" tIns="0" bIns="0">
+            <a:spAutoFit/>
+          </a:bodyPr>
+          <a:lstStyle/>
+          <a:p>
+            <a:pPr algn="l">
+              <a:lnSpc>
+                <a:spcPct val="130000"/>
+              </a:lnSpc>
+            </a:pPr>
+            <a:r>
+              <a:rPr sz="900" b="0" i="0">
+                <a:solidFill>
+                  <a:srgbClr val="87867F"/>
+                </a:solidFill>
+                <a:latin typeface="PT Sans"/>
+              </a:rPr>
+              <a:t>Литературная редакция · раздел 10</a:t>
+            </a:r>
+          </a:p>
+        </p:txBody>
+      </p:sp>
+      <p:sp>
+        <p:nvSpPr>
+          <p:cNvPr id="13" name="TextBox 12"/>
+          <p:cNvSpPr txBox="1"/>
+          <p:nvPr/>
+        </p:nvSpPr>
+        <p:spPr>
+          <a:xfrm>
             <a:off x="11155680" y="6446520"/>
             <a:ext cx="640080" cy="228600"/>
           </a:xfrm>
@@ -13846,6 +14353,45 @@
         </p:nvSpPr>
         <p:spPr>
           <a:xfrm>
+            <a:off x="658368" y="6446520"/>
+            <a:ext cx="10241280" cy="228600"/>
+          </a:xfrm>
+          <a:prstGeom prst="rect">
+            <a:avLst/>
+          </a:prstGeom>
+          <a:noFill/>
+        </p:spPr>
+        <p:txBody>
+          <a:bodyPr wrap="square" anchor="t" lIns="0" rIns="0" tIns="0" bIns="0">
+            <a:spAutoFit/>
+          </a:bodyPr>
+          <a:lstStyle/>
+          <a:p>
+            <a:pPr algn="l">
+              <a:lnSpc>
+                <a:spcPct val="130000"/>
+              </a:lnSpc>
+            </a:pPr>
+            <a:r>
+              <a:rPr sz="900" b="0" i="0">
+                <a:solidFill>
+                  <a:srgbClr val="87867F"/>
+                </a:solidFill>
+                <a:latin typeface="PT Sans"/>
+              </a:rPr>
+              <a:t>Литературная редакция · раздел 7</a:t>
+            </a:r>
+          </a:p>
+        </p:txBody>
+      </p:sp>
+      <p:sp>
+        <p:nvSpPr>
+          <p:cNvPr id="22" name="TextBox 21"/>
+          <p:cNvSpPr txBox="1"/>
+          <p:nvPr/>
+        </p:nvSpPr>
+        <p:spPr>
+          <a:xfrm>
             <a:off x="11155680" y="6446520"/>
             <a:ext cx="640080" cy="228600"/>
           </a:xfrm>
@@ -14454,6 +15000,45 @@
         </p:nvSpPr>
         <p:spPr>
           <a:xfrm>
+            <a:off x="658368" y="6446520"/>
+            <a:ext cx="10241280" cy="228600"/>
+          </a:xfrm>
+          <a:prstGeom prst="rect">
+            <a:avLst/>
+          </a:prstGeom>
+          <a:noFill/>
+        </p:spPr>
+        <p:txBody>
+          <a:bodyPr wrap="square" anchor="t" lIns="0" rIns="0" tIns="0" bIns="0">
+            <a:spAutoFit/>
+          </a:bodyPr>
+          <a:lstStyle/>
+          <a:p>
+            <a:pPr algn="l">
+              <a:lnSpc>
+                <a:spcPct val="130000"/>
+              </a:lnSpc>
+            </a:pPr>
+            <a:r>
+              <a:rPr sz="900" b="0" i="0">
+                <a:solidFill>
+                  <a:srgbClr val="87867F"/>
+                </a:solidFill>
+                <a:latin typeface="PT Sans"/>
+              </a:rPr>
+              <a:t>Литературная редакция · раздел 16</a:t>
+            </a:r>
+          </a:p>
+        </p:txBody>
+      </p:sp>
+      <p:sp>
+        <p:nvSpPr>
+          <p:cNvPr id="15" name="TextBox 14"/>
+          <p:cNvSpPr txBox="1"/>
+          <p:nvPr/>
+        </p:nvSpPr>
+        <p:spPr>
+          <a:xfrm>
             <a:off x="11155680" y="6446520"/>
             <a:ext cx="640080" cy="228600"/>
           </a:xfrm>
@@ -14658,7 +15243,7 @@
                 </a:solidFill>
                 <a:latin typeface="Playfair Display"/>
               </a:rPr>
-              <a:t>Цель нашего дома — не больше 13 часов.</a:t>
+              <a:t>Операционная цель дома — не больше 13 часов.</a:t>
             </a:r>
           </a:p>
         </p:txBody>
@@ -15899,6 +16484,45 @@
       <p:sp>
         <p:nvSpPr>
           <p:cNvPr id="35" name="TextBox 34"/>
+          <p:cNvSpPr txBox="1"/>
+          <p:nvPr/>
+        </p:nvSpPr>
+        <p:spPr>
+          <a:xfrm>
+            <a:off x="658368" y="6446520"/>
+            <a:ext cx="10241280" cy="228600"/>
+          </a:xfrm>
+          <a:prstGeom prst="rect">
+            <a:avLst/>
+          </a:prstGeom>
+          <a:noFill/>
+        </p:spPr>
+        <p:txBody>
+          <a:bodyPr wrap="square" anchor="t" lIns="0" rIns="0" tIns="0" bIns="0">
+            <a:spAutoFit/>
+          </a:bodyPr>
+          <a:lstStyle/>
+          <a:p>
+            <a:pPr algn="l">
+              <a:lnSpc>
+                <a:spcPct val="130000"/>
+              </a:lnSpc>
+            </a:pPr>
+            <a:r>
+              <a:rPr sz="900" b="0" i="0">
+                <a:solidFill>
+                  <a:srgbClr val="87867F"/>
+                </a:solidFill>
+                <a:latin typeface="PT Sans"/>
+              </a:rPr>
+              <a:t>Литературная редакция · разделы 7, 26</a:t>
+            </a:r>
+          </a:p>
+        </p:txBody>
+      </p:sp>
+      <p:sp>
+        <p:nvSpPr>
+          <p:cNvPr id="36" name="TextBox 35"/>
           <p:cNvSpPr txBox="1"/>
           <p:nvPr/>
         </p:nvSpPr>
@@ -17028,6 +17652,45 @@
         </p:nvSpPr>
         <p:spPr>
           <a:xfrm>
+            <a:off x="658368" y="6446520"/>
+            <a:ext cx="10241280" cy="228600"/>
+          </a:xfrm>
+          <a:prstGeom prst="rect">
+            <a:avLst/>
+          </a:prstGeom>
+          <a:noFill/>
+        </p:spPr>
+        <p:txBody>
+          <a:bodyPr wrap="square" anchor="t" lIns="0" rIns="0" tIns="0" bIns="0">
+            <a:spAutoFit/>
+          </a:bodyPr>
+          <a:lstStyle/>
+          <a:p>
+            <a:pPr algn="l">
+              <a:lnSpc>
+                <a:spcPct val="130000"/>
+              </a:lnSpc>
+            </a:pPr>
+            <a:r>
+              <a:rPr sz="900" b="0" i="0">
+                <a:solidFill>
+                  <a:srgbClr val="87867F"/>
+                </a:solidFill>
+                <a:latin typeface="PT Sans"/>
+              </a:rPr>
+              <a:t>Литературная редакция · разделы 31, 32</a:t>
+            </a:r>
+          </a:p>
+        </p:txBody>
+      </p:sp>
+      <p:sp>
+        <p:nvSpPr>
+          <p:cNvPr id="30" name="TextBox 29"/>
+          <p:cNvSpPr txBox="1"/>
+          <p:nvPr/>
+        </p:nvSpPr>
+        <p:spPr>
+          <a:xfrm>
             <a:off x="11155680" y="6446520"/>
             <a:ext cx="640080" cy="228600"/>
           </a:xfrm>
@@ -17685,6 +18348,45 @@
         </p:nvSpPr>
         <p:spPr>
           <a:xfrm>
+            <a:off x="658368" y="6446520"/>
+            <a:ext cx="10241280" cy="228600"/>
+          </a:xfrm>
+          <a:prstGeom prst="rect">
+            <a:avLst/>
+          </a:prstGeom>
+          <a:noFill/>
+        </p:spPr>
+        <p:txBody>
+          <a:bodyPr wrap="square" anchor="t" lIns="0" rIns="0" tIns="0" bIns="0">
+            <a:spAutoFit/>
+          </a:bodyPr>
+          <a:lstStyle/>
+          <a:p>
+            <a:pPr algn="l">
+              <a:lnSpc>
+                <a:spcPct val="130000"/>
+              </a:lnSpc>
+            </a:pPr>
+            <a:r>
+              <a:rPr sz="900" b="0" i="0">
+                <a:solidFill>
+                  <a:srgbClr val="87867F"/>
+                </a:solidFill>
+                <a:latin typeface="PT Sans"/>
+              </a:rPr>
+              <a:t>Литературная редакция · раздел 25</a:t>
+            </a:r>
+          </a:p>
+        </p:txBody>
+      </p:sp>
+      <p:sp>
+        <p:nvSpPr>
+          <p:cNvPr id="16" name="TextBox 15"/>
+          <p:cNvSpPr txBox="1"/>
+          <p:nvPr/>
+        </p:nvSpPr>
+        <p:spPr>
+          <a:xfrm>
             <a:off x="11155680" y="6446520"/>
             <a:ext cx="640080" cy="228600"/>
           </a:xfrm>
@@ -18336,6 +19038,45 @@
       <p:sp>
         <p:nvSpPr>
           <p:cNvPr id="17" name="TextBox 16"/>
+          <p:cNvSpPr txBox="1"/>
+          <p:nvPr/>
+        </p:nvSpPr>
+        <p:spPr>
+          <a:xfrm>
+            <a:off x="658368" y="6446520"/>
+            <a:ext cx="10241280" cy="228600"/>
+          </a:xfrm>
+          <a:prstGeom prst="rect">
+            <a:avLst/>
+          </a:prstGeom>
+          <a:noFill/>
+        </p:spPr>
+        <p:txBody>
+          <a:bodyPr wrap="square" anchor="t" lIns="0" rIns="0" tIns="0" bIns="0">
+            <a:spAutoFit/>
+          </a:bodyPr>
+          <a:lstStyle/>
+          <a:p>
+            <a:pPr algn="l">
+              <a:lnSpc>
+                <a:spcPct val="130000"/>
+              </a:lnSpc>
+            </a:pPr>
+            <a:r>
+              <a:rPr sz="900" b="0" i="0">
+                <a:solidFill>
+                  <a:srgbClr val="87867F"/>
+                </a:solidFill>
+                <a:latin typeface="PT Sans"/>
+              </a:rPr>
+              <a:t>Литературная редакция · раздел 25</a:t>
+            </a:r>
+          </a:p>
+        </p:txBody>
+      </p:sp>
+      <p:sp>
+        <p:nvSpPr>
+          <p:cNvPr id="18" name="TextBox 17"/>
           <p:cNvSpPr txBox="1"/>
           <p:nvPr/>
         </p:nvSpPr>

--- a/02_презентация/Презентация_v6_Не_просто_накормить.pptx
+++ b/02_презентация/Презентация_v6_Не_просто_накормить.pptx
@@ -15179,26 +15179,26 @@
         <p:spPr>
           <a:xfrm>
             <a:off x="658368" y="868680"/>
-            <a:ext cx="10972800" cy="640080"/>
-          </a:xfrm>
-          <a:prstGeom prst="rect">
-            <a:avLst/>
-          </a:prstGeom>
-          <a:noFill/>
-        </p:spPr>
-        <p:txBody>
-          <a:bodyPr wrap="square" anchor="t" lIns="0" rIns="0" tIns="0" bIns="0">
-            <a:spAutoFit/>
-          </a:bodyPr>
-          <a:lstStyle/>
-          <a:p>
-            <a:pPr algn="l">
-              <a:lnSpc>
-                <a:spcPct val="130000"/>
-              </a:lnSpc>
-            </a:pPr>
-            <a:r>
-              <a:rPr sz="2600" b="1" i="0">
+            <a:ext cx="10972800" cy="502920"/>
+          </a:xfrm>
+          <a:prstGeom prst="rect">
+            <a:avLst/>
+          </a:prstGeom>
+          <a:noFill/>
+        </p:spPr>
+        <p:txBody>
+          <a:bodyPr wrap="square" anchor="t" lIns="0" rIns="0" tIns="0" bIns="0">
+            <a:spAutoFit/>
+          </a:bodyPr>
+          <a:lstStyle/>
+          <a:p>
+            <a:pPr algn="l">
+              <a:lnSpc>
+                <a:spcPct val="110000"/>
+              </a:lnSpc>
+            </a:pPr>
+            <a:r>
+              <a:rPr sz="2800" b="1" i="0">
                 <a:solidFill>
                   <a:srgbClr val="141413"/>
                 </a:solidFill>
@@ -15217,7 +15217,7 @@
         </p:nvSpPr>
         <p:spPr>
           <a:xfrm>
-            <a:off x="658368" y="1417320"/>
+            <a:off x="658368" y="1371600"/>
             <a:ext cx="10972800" cy="365760"/>
           </a:xfrm>
           <a:prstGeom prst="rect">
@@ -15237,7 +15237,7 @@
               </a:lnSpc>
             </a:pPr>
             <a:r>
-              <a:rPr sz="2000" b="0" i="1">
+              <a:rPr sz="1800" b="0" i="1">
                 <a:solidFill>
                   <a:srgbClr val="6E6A5E"/>
                 </a:solidFill>
@@ -15256,8 +15256,330 @@
         </p:nvSpPr>
         <p:spPr>
           <a:xfrm>
-            <a:off x="658368" y="2926080"/>
-            <a:ext cx="10881360" cy="640080"/>
+            <a:off x="658368" y="1920240"/>
+            <a:ext cx="10881360" cy="1417320"/>
+          </a:xfrm>
+          <a:prstGeom prst="roundRect">
+            <a:avLst>
+              <a:gd name="adj" fmla="val 14000"/>
+            </a:avLst>
+          </a:prstGeom>
+          <a:solidFill>
+            <a:srgbClr val="F5E7DE"/>
+          </a:solidFill>
+          <a:ln>
+            <a:noFill/>
+          </a:ln>
+        </p:spPr>
+        <p:style>
+          <a:lnRef idx="1">
+            <a:schemeClr val="accent1"/>
+          </a:lnRef>
+          <a:fillRef idx="3">
+            <a:schemeClr val="accent1"/>
+          </a:fillRef>
+          <a:effectRef idx="2">
+            <a:schemeClr val="accent1"/>
+          </a:effectRef>
+          <a:fontRef idx="minor">
+            <a:schemeClr val="lt1"/>
+          </a:fontRef>
+        </p:style>
+        <p:txBody>
+          <a:bodyPr rtlCol="0" anchor="ctr"/>
+          <a:lstStyle/>
+          <a:p>
+            <a:pPr algn="ctr"/>
+          </a:p>
+        </p:txBody>
+      </p:sp>
+      <p:sp>
+        <p:nvSpPr>
+          <p:cNvPr id="7" name="TextBox 6"/>
+          <p:cNvSpPr txBox="1"/>
+          <p:nvPr/>
+        </p:nvSpPr>
+        <p:spPr>
+          <a:xfrm>
+            <a:off x="914400" y="2057400"/>
+            <a:ext cx="2560320" cy="320040"/>
+          </a:xfrm>
+          <a:prstGeom prst="rect">
+            <a:avLst/>
+          </a:prstGeom>
+          <a:noFill/>
+        </p:spPr>
+        <p:txBody>
+          <a:bodyPr wrap="square" anchor="t" lIns="0" rIns="0" tIns="0" bIns="0">
+            <a:spAutoFit/>
+          </a:bodyPr>
+          <a:lstStyle/>
+          <a:p>
+            <a:pPr algn="ctr">
+              <a:lnSpc>
+                <a:spcPct val="130000"/>
+              </a:lnSpc>
+            </a:pPr>
+            <a:r>
+              <a:rPr sz="1100" b="1" i="0">
+                <a:solidFill>
+                  <a:srgbClr val="B8552F"/>
+                </a:solidFill>
+                <a:latin typeface="PT Sans"/>
+              </a:rPr>
+              <a:t>УЖИН</a:t>
+            </a:r>
+          </a:p>
+        </p:txBody>
+      </p:sp>
+      <p:sp>
+        <p:nvSpPr>
+          <p:cNvPr id="8" name="TextBox 7"/>
+          <p:cNvSpPr txBox="1"/>
+          <p:nvPr/>
+        </p:nvSpPr>
+        <p:spPr>
+          <a:xfrm>
+            <a:off x="914400" y="2331720"/>
+            <a:ext cx="2560320" cy="502920"/>
+          </a:xfrm>
+          <a:prstGeom prst="rect">
+            <a:avLst/>
+          </a:prstGeom>
+          <a:noFill/>
+        </p:spPr>
+        <p:txBody>
+          <a:bodyPr wrap="square" anchor="t" lIns="0" rIns="0" tIns="0" bIns="0">
+            <a:spAutoFit/>
+          </a:bodyPr>
+          <a:lstStyle/>
+          <a:p>
+            <a:pPr algn="ctr">
+              <a:lnSpc>
+                <a:spcPct val="130000"/>
+              </a:lnSpc>
+            </a:pPr>
+            <a:r>
+              <a:rPr sz="3600" b="1" i="0">
+                <a:solidFill>
+                  <a:srgbClr val="141413"/>
+                </a:solidFill>
+                <a:latin typeface="Playfair Display"/>
+              </a:rPr>
+              <a:t>17:30</a:t>
+            </a:r>
+          </a:p>
+        </p:txBody>
+      </p:sp>
+      <p:sp>
+        <p:nvSpPr>
+          <p:cNvPr id="9" name="Right Arrow 8"/>
+          <p:cNvSpPr/>
+          <p:nvPr/>
+        </p:nvSpPr>
+        <p:spPr>
+          <a:xfrm>
+            <a:off x="3840480" y="2468880"/>
+            <a:ext cx="4480560" cy="384048"/>
+          </a:xfrm>
+          <a:prstGeom prst="rightArrow">
+            <a:avLst/>
+          </a:prstGeom>
+          <a:solidFill>
+            <a:srgbClr val="C15F3C"/>
+          </a:solidFill>
+          <a:ln>
+            <a:noFill/>
+          </a:ln>
+        </p:spPr>
+        <p:style>
+          <a:lnRef idx="1">
+            <a:schemeClr val="accent1"/>
+          </a:lnRef>
+          <a:fillRef idx="3">
+            <a:schemeClr val="accent1"/>
+          </a:fillRef>
+          <a:effectRef idx="2">
+            <a:schemeClr val="accent1"/>
+          </a:effectRef>
+          <a:fontRef idx="minor">
+            <a:schemeClr val="lt1"/>
+          </a:fontRef>
+        </p:style>
+        <p:txBody>
+          <a:bodyPr rtlCol="0" anchor="ctr"/>
+          <a:lstStyle/>
+          <a:p>
+            <a:pPr algn="ctr"/>
+          </a:p>
+        </p:txBody>
+      </p:sp>
+      <p:sp>
+        <p:nvSpPr>
+          <p:cNvPr id="10" name="TextBox 9"/>
+          <p:cNvSpPr txBox="1"/>
+          <p:nvPr/>
+        </p:nvSpPr>
+        <p:spPr>
+          <a:xfrm>
+            <a:off x="3840480" y="2057400"/>
+            <a:ext cx="4480560" cy="320040"/>
+          </a:xfrm>
+          <a:prstGeom prst="rect">
+            <a:avLst/>
+          </a:prstGeom>
+          <a:noFill/>
+        </p:spPr>
+        <p:txBody>
+          <a:bodyPr wrap="square" anchor="t" lIns="0" rIns="0" tIns="0" bIns="0">
+            <a:spAutoFit/>
+          </a:bodyPr>
+          <a:lstStyle/>
+          <a:p>
+            <a:pPr algn="ctr">
+              <a:lnSpc>
+                <a:spcPct val="130000"/>
+              </a:lnSpc>
+            </a:pPr>
+            <a:r>
+              <a:rPr sz="1600" b="1" i="0">
+                <a:solidFill>
+                  <a:srgbClr val="B8552F"/>
+                </a:solidFill>
+                <a:latin typeface="Playfair Display"/>
+              </a:rPr>
+              <a:t>15 часов  ·  через полночь</a:t>
+            </a:r>
+          </a:p>
+        </p:txBody>
+      </p:sp>
+      <p:sp>
+        <p:nvSpPr>
+          <p:cNvPr id="11" name="TextBox 10"/>
+          <p:cNvSpPr txBox="1"/>
+          <p:nvPr/>
+        </p:nvSpPr>
+        <p:spPr>
+          <a:xfrm>
+            <a:off x="3840480" y="2926080"/>
+            <a:ext cx="4480560" cy="274320"/>
+          </a:xfrm>
+          <a:prstGeom prst="rect">
+            <a:avLst/>
+          </a:prstGeom>
+          <a:noFill/>
+        </p:spPr>
+        <p:txBody>
+          <a:bodyPr wrap="square" anchor="t" lIns="0" rIns="0" tIns="0" bIns="0">
+            <a:spAutoFit/>
+          </a:bodyPr>
+          <a:lstStyle/>
+          <a:p>
+            <a:pPr algn="ctr">
+              <a:lnSpc>
+                <a:spcPct val="130000"/>
+              </a:lnSpc>
+            </a:pPr>
+            <a:r>
+              <a:rPr sz="1300" b="0" i="0">
+                <a:solidFill>
+                  <a:srgbClr val="6E6A5E"/>
+                </a:solidFill>
+                <a:latin typeface="PT Sans"/>
+              </a:rPr>
+              <a:t>без еды</a:t>
+            </a:r>
+          </a:p>
+        </p:txBody>
+      </p:sp>
+      <p:sp>
+        <p:nvSpPr>
+          <p:cNvPr id="12" name="TextBox 11"/>
+          <p:cNvSpPr txBox="1"/>
+          <p:nvPr/>
+        </p:nvSpPr>
+        <p:spPr>
+          <a:xfrm>
+            <a:off x="8686800" y="2057400"/>
+            <a:ext cx="2560320" cy="320040"/>
+          </a:xfrm>
+          <a:prstGeom prst="rect">
+            <a:avLst/>
+          </a:prstGeom>
+          <a:noFill/>
+        </p:spPr>
+        <p:txBody>
+          <a:bodyPr wrap="square" anchor="t" lIns="0" rIns="0" tIns="0" bIns="0">
+            <a:spAutoFit/>
+          </a:bodyPr>
+          <a:lstStyle/>
+          <a:p>
+            <a:pPr algn="ctr">
+              <a:lnSpc>
+                <a:spcPct val="130000"/>
+              </a:lnSpc>
+            </a:pPr>
+            <a:r>
+              <a:rPr sz="1100" b="1" i="0">
+                <a:solidFill>
+                  <a:srgbClr val="B8552F"/>
+                </a:solidFill>
+                <a:latin typeface="PT Sans"/>
+              </a:rPr>
+              <a:t>ЗАВТРАК</a:t>
+            </a:r>
+          </a:p>
+        </p:txBody>
+      </p:sp>
+      <p:sp>
+        <p:nvSpPr>
+          <p:cNvPr id="13" name="TextBox 12"/>
+          <p:cNvSpPr txBox="1"/>
+          <p:nvPr/>
+        </p:nvSpPr>
+        <p:spPr>
+          <a:xfrm>
+            <a:off x="8686800" y="2331720"/>
+            <a:ext cx="2560320" cy="502920"/>
+          </a:xfrm>
+          <a:prstGeom prst="rect">
+            <a:avLst/>
+          </a:prstGeom>
+          <a:noFill/>
+        </p:spPr>
+        <p:txBody>
+          <a:bodyPr wrap="square" anchor="t" lIns="0" rIns="0" tIns="0" bIns="0">
+            <a:spAutoFit/>
+          </a:bodyPr>
+          <a:lstStyle/>
+          <a:p>
+            <a:pPr algn="ctr">
+              <a:lnSpc>
+                <a:spcPct val="130000"/>
+              </a:lnSpc>
+            </a:pPr>
+            <a:r>
+              <a:rPr sz="3600" b="1" i="0">
+                <a:solidFill>
+                  <a:srgbClr val="141413"/>
+                </a:solidFill>
+                <a:latin typeface="Playfair Display"/>
+              </a:rPr>
+              <a:t>8:30</a:t>
+            </a:r>
+          </a:p>
+        </p:txBody>
+      </p:sp>
+      <p:sp>
+        <p:nvSpPr>
+          <p:cNvPr id="14" name="Rounded Rectangle 13"/>
+          <p:cNvSpPr/>
+          <p:nvPr/>
+        </p:nvSpPr>
+        <p:spPr>
+          <a:xfrm>
+            <a:off x="658368" y="3566160"/>
+            <a:ext cx="10881360" cy="384048"/>
           </a:xfrm>
           <a:prstGeom prst="roundRect">
             <a:avLst>
@@ -15295,696 +15617,19 @@
       </p:sp>
       <p:sp>
         <p:nvSpPr>
-          <p:cNvPr id="7" name="Rectangle 6"/>
+          <p:cNvPr id="15" name="Rounded Rectangle 14"/>
           <p:cNvSpPr/>
           <p:nvPr/>
         </p:nvSpPr>
         <p:spPr>
           <a:xfrm>
-            <a:off x="3378708" y="2926080"/>
-            <a:ext cx="7254240" cy="640080"/>
-          </a:xfrm>
-          <a:prstGeom prst="rect">
-            <a:avLst/>
-          </a:prstGeom>
-          <a:solidFill>
-            <a:srgbClr val="FAF9F5"/>
-          </a:solidFill>
-          <a:ln w="6350">
-            <a:solidFill>
-              <a:srgbClr val="E3DCCE"/>
-            </a:solidFill>
-          </a:ln>
-        </p:spPr>
-        <p:style>
-          <a:lnRef idx="1">
-            <a:schemeClr val="accent1"/>
-          </a:lnRef>
-          <a:fillRef idx="3">
-            <a:schemeClr val="accent1"/>
-          </a:fillRef>
-          <a:effectRef idx="2">
-            <a:schemeClr val="accent1"/>
-          </a:effectRef>
-          <a:fontRef idx="minor">
-            <a:schemeClr val="lt1"/>
-          </a:fontRef>
-        </p:style>
-        <p:txBody>
-          <a:bodyPr rtlCol="0" anchor="ctr"/>
-          <a:lstStyle/>
-          <a:p>
-            <a:pPr algn="ctr"/>
-          </a:p>
-        </p:txBody>
-      </p:sp>
-      <p:sp>
-        <p:nvSpPr>
-          <p:cNvPr id="8" name="TextBox 7"/>
-          <p:cNvSpPr txBox="1"/>
-          <p:nvPr/>
-        </p:nvSpPr>
-        <p:spPr>
-          <a:xfrm>
-            <a:off x="475488" y="3611880"/>
-            <a:ext cx="365760" cy="274320"/>
-          </a:xfrm>
-          <a:prstGeom prst="rect">
-            <a:avLst/>
-          </a:prstGeom>
-          <a:noFill/>
-        </p:spPr>
-        <p:txBody>
-          <a:bodyPr wrap="square" anchor="t" lIns="0" rIns="0" tIns="0" bIns="0">
-            <a:spAutoFit/>
-          </a:bodyPr>
-          <a:lstStyle/>
-          <a:p>
-            <a:pPr algn="ctr">
-              <a:lnSpc>
-                <a:spcPct val="130000"/>
-              </a:lnSpc>
-            </a:pPr>
-            <a:r>
-              <a:rPr sz="1000" b="0" i="0">
-                <a:solidFill>
-                  <a:srgbClr val="87867F"/>
-                </a:solidFill>
-                <a:latin typeface="PT Sans"/>
-              </a:rPr>
-              <a:t>00</a:t>
-            </a:r>
-          </a:p>
-        </p:txBody>
-      </p:sp>
-      <p:sp>
-        <p:nvSpPr>
-          <p:cNvPr id="9" name="TextBox 8"/>
-          <p:cNvSpPr txBox="1"/>
-          <p:nvPr/>
-        </p:nvSpPr>
-        <p:spPr>
-          <a:xfrm>
-            <a:off x="3195828" y="3611880"/>
-            <a:ext cx="365760" cy="274320"/>
-          </a:xfrm>
-          <a:prstGeom prst="rect">
-            <a:avLst/>
-          </a:prstGeom>
-          <a:noFill/>
-        </p:spPr>
-        <p:txBody>
-          <a:bodyPr wrap="square" anchor="t" lIns="0" rIns="0" tIns="0" bIns="0">
-            <a:spAutoFit/>
-          </a:bodyPr>
-          <a:lstStyle/>
-          <a:p>
-            <a:pPr algn="ctr">
-              <a:lnSpc>
-                <a:spcPct val="130000"/>
-              </a:lnSpc>
-            </a:pPr>
-            <a:r>
-              <a:rPr sz="1000" b="0" i="0">
-                <a:solidFill>
-                  <a:srgbClr val="87867F"/>
-                </a:solidFill>
-                <a:latin typeface="PT Sans"/>
-              </a:rPr>
-              <a:t>06</a:t>
-            </a:r>
-          </a:p>
-        </p:txBody>
-      </p:sp>
-      <p:sp>
-        <p:nvSpPr>
-          <p:cNvPr id="10" name="TextBox 9"/>
-          <p:cNvSpPr txBox="1"/>
-          <p:nvPr/>
-        </p:nvSpPr>
-        <p:spPr>
-          <a:xfrm>
-            <a:off x="5916168" y="3611880"/>
-            <a:ext cx="365760" cy="274320"/>
-          </a:xfrm>
-          <a:prstGeom prst="rect">
-            <a:avLst/>
-          </a:prstGeom>
-          <a:noFill/>
-        </p:spPr>
-        <p:txBody>
-          <a:bodyPr wrap="square" anchor="t" lIns="0" rIns="0" tIns="0" bIns="0">
-            <a:spAutoFit/>
-          </a:bodyPr>
-          <a:lstStyle/>
-          <a:p>
-            <a:pPr algn="ctr">
-              <a:lnSpc>
-                <a:spcPct val="130000"/>
-              </a:lnSpc>
-            </a:pPr>
-            <a:r>
-              <a:rPr sz="1000" b="0" i="0">
-                <a:solidFill>
-                  <a:srgbClr val="87867F"/>
-                </a:solidFill>
-                <a:latin typeface="PT Sans"/>
-              </a:rPr>
-              <a:t>12</a:t>
-            </a:r>
-          </a:p>
-        </p:txBody>
-      </p:sp>
-      <p:sp>
-        <p:nvSpPr>
-          <p:cNvPr id="11" name="TextBox 10"/>
-          <p:cNvSpPr txBox="1"/>
-          <p:nvPr/>
-        </p:nvSpPr>
-        <p:spPr>
-          <a:xfrm>
-            <a:off x="8636508" y="3611880"/>
-            <a:ext cx="365760" cy="274320"/>
-          </a:xfrm>
-          <a:prstGeom prst="rect">
-            <a:avLst/>
-          </a:prstGeom>
-          <a:noFill/>
-        </p:spPr>
-        <p:txBody>
-          <a:bodyPr wrap="square" anchor="t" lIns="0" rIns="0" tIns="0" bIns="0">
-            <a:spAutoFit/>
-          </a:bodyPr>
-          <a:lstStyle/>
-          <a:p>
-            <a:pPr algn="ctr">
-              <a:lnSpc>
-                <a:spcPct val="130000"/>
-              </a:lnSpc>
-            </a:pPr>
-            <a:r>
-              <a:rPr sz="1000" b="0" i="0">
-                <a:solidFill>
-                  <a:srgbClr val="87867F"/>
-                </a:solidFill>
-                <a:latin typeface="PT Sans"/>
-              </a:rPr>
-              <a:t>18</a:t>
-            </a:r>
-          </a:p>
-        </p:txBody>
-      </p:sp>
-      <p:sp>
-        <p:nvSpPr>
-          <p:cNvPr id="12" name="TextBox 11"/>
-          <p:cNvSpPr txBox="1"/>
-          <p:nvPr/>
-        </p:nvSpPr>
-        <p:spPr>
-          <a:xfrm>
-            <a:off x="11356848" y="3611880"/>
-            <a:ext cx="365760" cy="274320"/>
-          </a:xfrm>
-          <a:prstGeom prst="rect">
-            <a:avLst/>
-          </a:prstGeom>
-          <a:noFill/>
-        </p:spPr>
-        <p:txBody>
-          <a:bodyPr wrap="square" anchor="t" lIns="0" rIns="0" tIns="0" bIns="0">
-            <a:spAutoFit/>
-          </a:bodyPr>
-          <a:lstStyle/>
-          <a:p>
-            <a:pPr algn="ctr">
-              <a:lnSpc>
-                <a:spcPct val="130000"/>
-              </a:lnSpc>
-            </a:pPr>
-            <a:r>
-              <a:rPr sz="1000" b="0" i="0">
-                <a:solidFill>
-                  <a:srgbClr val="87867F"/>
-                </a:solidFill>
-                <a:latin typeface="PT Sans"/>
-              </a:rPr>
-              <a:t>24</a:t>
-            </a:r>
-          </a:p>
-        </p:txBody>
-      </p:sp>
-      <p:sp>
-        <p:nvSpPr>
-          <p:cNvPr id="13" name="Oval 12"/>
-          <p:cNvSpPr/>
-          <p:nvPr/>
-        </p:nvSpPr>
-        <p:spPr>
-          <a:xfrm>
-            <a:off x="4428073" y="3127248"/>
-            <a:ext cx="164592" cy="237744"/>
-          </a:xfrm>
-          <a:prstGeom prst="ellipse">
-            <a:avLst/>
-          </a:prstGeom>
-          <a:solidFill>
-            <a:srgbClr val="141413"/>
-          </a:solidFill>
-          <a:ln w="25400">
-            <a:solidFill>
-              <a:srgbClr val="FAF9F5"/>
-            </a:solidFill>
-          </a:ln>
-        </p:spPr>
-        <p:style>
-          <a:lnRef idx="1">
-            <a:schemeClr val="accent1"/>
-          </a:lnRef>
-          <a:fillRef idx="3">
-            <a:schemeClr val="accent1"/>
-          </a:fillRef>
-          <a:effectRef idx="2">
-            <a:schemeClr val="accent1"/>
-          </a:effectRef>
-          <a:fontRef idx="minor">
-            <a:schemeClr val="lt1"/>
-          </a:fontRef>
-        </p:style>
-        <p:txBody>
-          <a:bodyPr rtlCol="0" anchor="ctr"/>
-          <a:lstStyle/>
-          <a:p>
-            <a:pPr algn="ctr"/>
-          </a:p>
-        </p:txBody>
-      </p:sp>
-      <p:sp>
-        <p:nvSpPr>
-          <p:cNvPr id="14" name="Oval 13"/>
-          <p:cNvSpPr/>
-          <p:nvPr/>
-        </p:nvSpPr>
-        <p:spPr>
-          <a:xfrm>
-            <a:off x="6473769" y="3127248"/>
-            <a:ext cx="164592" cy="237744"/>
-          </a:xfrm>
-          <a:prstGeom prst="ellipse">
-            <a:avLst/>
-          </a:prstGeom>
-          <a:solidFill>
-            <a:srgbClr val="141413"/>
-          </a:solidFill>
-          <a:ln w="25400">
-            <a:solidFill>
-              <a:srgbClr val="FAF9F5"/>
-            </a:solidFill>
-          </a:ln>
-        </p:spPr>
-        <p:style>
-          <a:lnRef idx="1">
-            <a:schemeClr val="accent1"/>
-          </a:lnRef>
-          <a:fillRef idx="3">
-            <a:schemeClr val="accent1"/>
-          </a:fillRef>
-          <a:effectRef idx="2">
-            <a:schemeClr val="accent1"/>
-          </a:effectRef>
-          <a:fontRef idx="minor">
-            <a:schemeClr val="lt1"/>
-          </a:fontRef>
-        </p:style>
-        <p:txBody>
-          <a:bodyPr rtlCol="0" anchor="ctr"/>
-          <a:lstStyle/>
-          <a:p>
-            <a:pPr algn="ctr"/>
-          </a:p>
-        </p:txBody>
-      </p:sp>
-      <p:sp>
-        <p:nvSpPr>
-          <p:cNvPr id="15" name="Oval 14"/>
-          <p:cNvSpPr/>
-          <p:nvPr/>
-        </p:nvSpPr>
-        <p:spPr>
-          <a:xfrm>
-            <a:off x="8508583" y="3127248"/>
-            <a:ext cx="164592" cy="237744"/>
-          </a:xfrm>
-          <a:prstGeom prst="ellipse">
-            <a:avLst/>
-          </a:prstGeom>
-          <a:solidFill>
-            <a:srgbClr val="141413"/>
-          </a:solidFill>
-          <a:ln w="25400">
-            <a:solidFill>
-              <a:srgbClr val="FAF9F5"/>
-            </a:solidFill>
-          </a:ln>
-        </p:spPr>
-        <p:style>
-          <a:lnRef idx="1">
-            <a:schemeClr val="accent1"/>
-          </a:lnRef>
-          <a:fillRef idx="3">
-            <a:schemeClr val="accent1"/>
-          </a:fillRef>
-          <a:effectRef idx="2">
-            <a:schemeClr val="accent1"/>
-          </a:effectRef>
-          <a:fontRef idx="minor">
-            <a:schemeClr val="lt1"/>
-          </a:fontRef>
-        </p:style>
-        <p:txBody>
-          <a:bodyPr rtlCol="0" anchor="ctr"/>
-          <a:lstStyle/>
-          <a:p>
-            <a:pPr algn="ctr"/>
-          </a:p>
-        </p:txBody>
-      </p:sp>
-      <p:sp>
-        <p:nvSpPr>
-          <p:cNvPr id="16" name="TextBox 15"/>
-          <p:cNvSpPr txBox="1"/>
-          <p:nvPr/>
-        </p:nvSpPr>
-        <p:spPr>
-          <a:xfrm>
-            <a:off x="3870289" y="3931920"/>
-            <a:ext cx="1280160" cy="274320"/>
-          </a:xfrm>
-          <a:prstGeom prst="rect">
-            <a:avLst/>
-          </a:prstGeom>
-          <a:noFill/>
-        </p:spPr>
-        <p:txBody>
-          <a:bodyPr wrap="square" anchor="t" lIns="0" rIns="0" tIns="0" bIns="0">
-            <a:spAutoFit/>
-          </a:bodyPr>
-          <a:lstStyle/>
-          <a:p>
-            <a:pPr algn="ctr">
-              <a:lnSpc>
-                <a:spcPct val="130000"/>
-              </a:lnSpc>
-            </a:pPr>
-            <a:r>
-              <a:rPr sz="1100" b="0" i="0">
-                <a:solidFill>
-                  <a:srgbClr val="141413"/>
-                </a:solidFill>
-                <a:latin typeface="PT Sans"/>
-              </a:rPr>
-              <a:t>завтрак</a:t>
-            </a:r>
-          </a:p>
-        </p:txBody>
-      </p:sp>
-      <p:sp>
-        <p:nvSpPr>
-          <p:cNvPr id="17" name="TextBox 16"/>
-          <p:cNvSpPr txBox="1"/>
-          <p:nvPr/>
-        </p:nvSpPr>
-        <p:spPr>
-          <a:xfrm>
-            <a:off x="3870289" y="4206240"/>
-            <a:ext cx="1280160" cy="274320"/>
-          </a:xfrm>
-          <a:prstGeom prst="rect">
-            <a:avLst/>
-          </a:prstGeom>
-          <a:noFill/>
-        </p:spPr>
-        <p:txBody>
-          <a:bodyPr wrap="square" anchor="t" lIns="0" rIns="0" tIns="0" bIns="0">
-            <a:spAutoFit/>
-          </a:bodyPr>
-          <a:lstStyle/>
-          <a:p>
-            <a:pPr algn="ctr">
-              <a:lnSpc>
-                <a:spcPct val="130000"/>
-              </a:lnSpc>
-            </a:pPr>
-            <a:r>
-              <a:rPr sz="900" b="0" i="0">
-                <a:solidFill>
-                  <a:srgbClr val="87867F"/>
-                </a:solidFill>
-                <a:latin typeface="PT Sans"/>
-              </a:rPr>
-              <a:t>8:30</a:t>
-            </a:r>
-          </a:p>
-        </p:txBody>
-      </p:sp>
-      <p:sp>
-        <p:nvSpPr>
-          <p:cNvPr id="18" name="TextBox 17"/>
-          <p:cNvSpPr txBox="1"/>
-          <p:nvPr/>
-        </p:nvSpPr>
-        <p:spPr>
-          <a:xfrm>
-            <a:off x="5915985" y="3931920"/>
-            <a:ext cx="1280160" cy="274320"/>
-          </a:xfrm>
-          <a:prstGeom prst="rect">
-            <a:avLst/>
-          </a:prstGeom>
-          <a:noFill/>
-        </p:spPr>
-        <p:txBody>
-          <a:bodyPr wrap="square" anchor="t" lIns="0" rIns="0" tIns="0" bIns="0">
-            <a:spAutoFit/>
-          </a:bodyPr>
-          <a:lstStyle/>
-          <a:p>
-            <a:pPr algn="ctr">
-              <a:lnSpc>
-                <a:spcPct val="130000"/>
-              </a:lnSpc>
-            </a:pPr>
-            <a:r>
-              <a:rPr sz="1100" b="0" i="0">
-                <a:solidFill>
-                  <a:srgbClr val="141413"/>
-                </a:solidFill>
-                <a:latin typeface="PT Sans"/>
-              </a:rPr>
-              <a:t>обед</a:t>
-            </a:r>
-          </a:p>
-        </p:txBody>
-      </p:sp>
-      <p:sp>
-        <p:nvSpPr>
-          <p:cNvPr id="19" name="TextBox 18"/>
-          <p:cNvSpPr txBox="1"/>
-          <p:nvPr/>
-        </p:nvSpPr>
-        <p:spPr>
-          <a:xfrm>
-            <a:off x="5915985" y="4206240"/>
-            <a:ext cx="1280160" cy="274320"/>
-          </a:xfrm>
-          <a:prstGeom prst="rect">
-            <a:avLst/>
-          </a:prstGeom>
-          <a:noFill/>
-        </p:spPr>
-        <p:txBody>
-          <a:bodyPr wrap="square" anchor="t" lIns="0" rIns="0" tIns="0" bIns="0">
-            <a:spAutoFit/>
-          </a:bodyPr>
-          <a:lstStyle/>
-          <a:p>
-            <a:pPr algn="ctr">
-              <a:lnSpc>
-                <a:spcPct val="130000"/>
-              </a:lnSpc>
-            </a:pPr>
-            <a:r>
-              <a:rPr sz="900" b="0" i="0">
-                <a:solidFill>
-                  <a:srgbClr val="87867F"/>
-                </a:solidFill>
-                <a:latin typeface="PT Sans"/>
-              </a:rPr>
-              <a:t>13:00</a:t>
-            </a:r>
-          </a:p>
-        </p:txBody>
-      </p:sp>
-      <p:sp>
-        <p:nvSpPr>
-          <p:cNvPr id="20" name="TextBox 19"/>
-          <p:cNvSpPr txBox="1"/>
-          <p:nvPr/>
-        </p:nvSpPr>
-        <p:spPr>
-          <a:xfrm>
-            <a:off x="7950799" y="3931920"/>
-            <a:ext cx="1280160" cy="274320"/>
-          </a:xfrm>
-          <a:prstGeom prst="rect">
-            <a:avLst/>
-          </a:prstGeom>
-          <a:noFill/>
-        </p:spPr>
-        <p:txBody>
-          <a:bodyPr wrap="square" anchor="t" lIns="0" rIns="0" tIns="0" bIns="0">
-            <a:spAutoFit/>
-          </a:bodyPr>
-          <a:lstStyle/>
-          <a:p>
-            <a:pPr algn="ctr">
-              <a:lnSpc>
-                <a:spcPct val="130000"/>
-              </a:lnSpc>
-            </a:pPr>
-            <a:r>
-              <a:rPr sz="1100" b="0" i="0">
-                <a:solidFill>
-                  <a:srgbClr val="141413"/>
-                </a:solidFill>
-                <a:latin typeface="PT Sans"/>
-              </a:rPr>
-              <a:t>ужин</a:t>
-            </a:r>
-          </a:p>
-        </p:txBody>
-      </p:sp>
-      <p:sp>
-        <p:nvSpPr>
-          <p:cNvPr id="21" name="TextBox 20"/>
-          <p:cNvSpPr txBox="1"/>
-          <p:nvPr/>
-        </p:nvSpPr>
-        <p:spPr>
-          <a:xfrm>
-            <a:off x="7950799" y="4206240"/>
-            <a:ext cx="1280160" cy="274320"/>
-          </a:xfrm>
-          <a:prstGeom prst="rect">
-            <a:avLst/>
-          </a:prstGeom>
-          <a:noFill/>
-        </p:spPr>
-        <p:txBody>
-          <a:bodyPr wrap="square" anchor="t" lIns="0" rIns="0" tIns="0" bIns="0">
-            <a:spAutoFit/>
-          </a:bodyPr>
-          <a:lstStyle/>
-          <a:p>
-            <a:pPr algn="ctr">
-              <a:lnSpc>
-                <a:spcPct val="130000"/>
-              </a:lnSpc>
-            </a:pPr>
-            <a:r>
-              <a:rPr sz="900" b="0" i="0">
-                <a:solidFill>
-                  <a:srgbClr val="87867F"/>
-                </a:solidFill>
-                <a:latin typeface="PT Sans"/>
-              </a:rPr>
-              <a:t>17:30</a:t>
-            </a:r>
-          </a:p>
-        </p:txBody>
-      </p:sp>
-      <p:cxnSp>
-        <p:nvCxnSpPr>
-          <p:cNvPr id="22" name="Connector 21"/>
-          <p:cNvCxnSpPr/>
-          <p:nvPr/>
-        </p:nvCxnSpPr>
-        <p:spPr>
-          <a:xfrm>
-            <a:off x="8590879" y="2423160"/>
-            <a:ext cx="2948849" cy="0"/>
-          </a:xfrm>
-          <a:prstGeom prst="line">
-            <a:avLst/>
-          </a:prstGeom>
-          <a:ln w="31750">
-            <a:solidFill>
-              <a:srgbClr val="C15F3C"/>
-            </a:solidFill>
-          </a:ln>
-        </p:spPr>
-        <p:style>
-          <a:lnRef idx="2">
-            <a:schemeClr val="accent1"/>
-          </a:lnRef>
-          <a:fillRef idx="0">
-            <a:schemeClr val="accent1"/>
-          </a:fillRef>
-          <a:effectRef idx="1">
-            <a:schemeClr val="accent1"/>
-          </a:effectRef>
-          <a:fontRef idx="minor">
-            <a:schemeClr val="tx1"/>
-          </a:fontRef>
-        </p:style>
-      </p:cxnSp>
-      <p:cxnSp>
-        <p:nvCxnSpPr>
-          <p:cNvPr id="23" name="Connector 22"/>
-          <p:cNvCxnSpPr/>
-          <p:nvPr/>
-        </p:nvCxnSpPr>
-        <p:spPr>
-          <a:xfrm>
-            <a:off x="658368" y="2423160"/>
-            <a:ext cx="3852001" cy="0"/>
-          </a:xfrm>
-          <a:prstGeom prst="line">
-            <a:avLst/>
-          </a:prstGeom>
-          <a:ln w="31750">
-            <a:solidFill>
-              <a:srgbClr val="C15F3C"/>
-            </a:solidFill>
-          </a:ln>
-        </p:spPr>
-        <p:style>
-          <a:lnRef idx="2">
-            <a:schemeClr val="accent1"/>
-          </a:lnRef>
-          <a:fillRef idx="0">
-            <a:schemeClr val="accent1"/>
-          </a:fillRef>
-          <a:effectRef idx="1">
-            <a:schemeClr val="accent1"/>
-          </a:effectRef>
-          <a:fontRef idx="minor">
-            <a:schemeClr val="tx1"/>
-          </a:fontRef>
-        </p:style>
-      </p:cxnSp>
-      <p:sp>
-        <p:nvSpPr>
-          <p:cNvPr id="24" name="Left Arrow 23"/>
-          <p:cNvSpPr/>
-          <p:nvPr/>
-        </p:nvSpPr>
-        <p:spPr>
-          <a:xfrm>
-            <a:off x="4464649" y="2359152"/>
-            <a:ext cx="164592" cy="128016"/>
-          </a:xfrm>
-          <a:prstGeom prst="leftArrow">
-            <a:avLst/>
+            <a:off x="658368" y="3566160"/>
+            <a:ext cx="3853815" cy="384048"/>
+          </a:xfrm>
+          <a:prstGeom prst="roundRect">
+            <a:avLst>
+              <a:gd name="adj" fmla="val 8000"/>
+            </a:avLst>
           </a:prstGeom>
           <a:solidFill>
             <a:srgbClr val="C15F3C"/>
@@ -16017,17 +15662,19 @@
       </p:sp>
       <p:sp>
         <p:nvSpPr>
-          <p:cNvPr id="25" name="Right Arrow 24"/>
+          <p:cNvPr id="16" name="Rounded Rectangle 15"/>
           <p:cNvSpPr/>
           <p:nvPr/>
         </p:nvSpPr>
         <p:spPr>
           <a:xfrm>
-            <a:off x="8472007" y="2359152"/>
-            <a:ext cx="164592" cy="128016"/>
-          </a:xfrm>
-          <a:prstGeom prst="rightArrow">
-            <a:avLst/>
+            <a:off x="8592693" y="3566160"/>
+            <a:ext cx="2947035" cy="384048"/>
+          </a:xfrm>
+          <a:prstGeom prst="roundRect">
+            <a:avLst>
+              <a:gd name="adj" fmla="val 8000"/>
+            </a:avLst>
           </a:prstGeom>
           <a:solidFill>
             <a:srgbClr val="C15F3C"/>
@@ -16060,14 +15707,14 @@
       </p:sp>
       <p:sp>
         <p:nvSpPr>
-          <p:cNvPr id="26" name="TextBox 25"/>
-          <p:cNvSpPr txBox="1"/>
-          <p:nvPr/>
-        </p:nvSpPr>
-        <p:spPr>
-          <a:xfrm>
-            <a:off x="5276088" y="1920240"/>
-            <a:ext cx="1645920" cy="320040"/>
+          <p:cNvPr id="17" name="TextBox 16"/>
+          <p:cNvSpPr txBox="1"/>
+          <p:nvPr/>
+        </p:nvSpPr>
+        <p:spPr>
+          <a:xfrm>
+            <a:off x="429768" y="3995928"/>
+            <a:ext cx="457200" cy="256032"/>
           </a:xfrm>
           <a:prstGeom prst="rect">
             <a:avLst/>
@@ -16086,62 +15733,27 @@
               </a:lnSpc>
             </a:pPr>
             <a:r>
-              <a:rPr sz="1400" b="1" i="0">
-                <a:solidFill>
-                  <a:srgbClr val="C15F3C"/>
-                </a:solidFill>
-                <a:latin typeface="Playfair Display"/>
-              </a:rPr>
-              <a:t>через полночь  ·  15 ч</a:t>
-            </a:r>
-          </a:p>
-        </p:txBody>
-      </p:sp>
-      <p:cxnSp>
-        <p:nvCxnSpPr>
-          <p:cNvPr id="27" name="Connector 26"/>
-          <p:cNvCxnSpPr/>
-          <p:nvPr/>
-        </p:nvCxnSpPr>
-        <p:spPr>
-          <a:xfrm>
-            <a:off x="11539728" y="2423160"/>
-            <a:ext cx="0" cy="457200"/>
-          </a:xfrm>
-          <a:prstGeom prst="line">
-            <a:avLst/>
-          </a:prstGeom>
-          <a:ln w="12700">
-            <a:solidFill>
-              <a:srgbClr val="C15F3C"/>
-            </a:solidFill>
-          </a:ln>
-        </p:spPr>
-        <p:style>
-          <a:lnRef idx="2">
-            <a:schemeClr val="accent1"/>
-          </a:lnRef>
-          <a:fillRef idx="0">
-            <a:schemeClr val="accent1"/>
-          </a:fillRef>
-          <a:effectRef idx="1">
-            <a:schemeClr val="accent1"/>
-          </a:effectRef>
-          <a:fontRef idx="minor">
-            <a:schemeClr val="tx1"/>
-          </a:fontRef>
-        </p:style>
-      </p:cxnSp>
-      <p:sp>
-        <p:nvSpPr>
-          <p:cNvPr id="28" name="TextBox 27"/>
-          <p:cNvSpPr txBox="1"/>
-          <p:nvPr/>
-        </p:nvSpPr>
-        <p:spPr>
-          <a:xfrm>
-            <a:off x="11082528" y="2221992"/>
-            <a:ext cx="914400" cy="228600"/>
+              <a:rPr sz="1000" b="0" i="0">
+                <a:solidFill>
+                  <a:srgbClr val="87867F"/>
+                </a:solidFill>
+                <a:latin typeface="PT Sans"/>
+              </a:rPr>
+              <a:t>00</a:t>
+            </a:r>
+          </a:p>
+        </p:txBody>
+      </p:sp>
+      <p:sp>
+        <p:nvSpPr>
+          <p:cNvPr id="18" name="TextBox 17"/>
+          <p:cNvSpPr txBox="1"/>
+          <p:nvPr/>
+        </p:nvSpPr>
+        <p:spPr>
+          <a:xfrm>
+            <a:off x="3150108" y="3995928"/>
+            <a:ext cx="457200" cy="256032"/>
           </a:xfrm>
           <a:prstGeom prst="rect">
             <a:avLst/>
@@ -16160,26 +15772,143 @@
               </a:lnSpc>
             </a:pPr>
             <a:r>
-              <a:rPr sz="800" b="0" i="0">
+              <a:rPr sz="1000" b="0" i="0">
                 <a:solidFill>
                   <a:srgbClr val="87867F"/>
                 </a:solidFill>
                 <a:latin typeface="PT Sans"/>
               </a:rPr>
-              <a:t>полночь</a:t>
-            </a:r>
-          </a:p>
-        </p:txBody>
-      </p:sp>
-      <p:sp>
-        <p:nvSpPr>
-          <p:cNvPr id="29" name="Rounded Rectangle 28"/>
+              <a:t>06</a:t>
+            </a:r>
+          </a:p>
+        </p:txBody>
+      </p:sp>
+      <p:sp>
+        <p:nvSpPr>
+          <p:cNvPr id="19" name="TextBox 18"/>
+          <p:cNvSpPr txBox="1"/>
+          <p:nvPr/>
+        </p:nvSpPr>
+        <p:spPr>
+          <a:xfrm>
+            <a:off x="5870448" y="3995928"/>
+            <a:ext cx="457200" cy="256032"/>
+          </a:xfrm>
+          <a:prstGeom prst="rect">
+            <a:avLst/>
+          </a:prstGeom>
+          <a:noFill/>
+        </p:spPr>
+        <p:txBody>
+          <a:bodyPr wrap="square" anchor="t" lIns="0" rIns="0" tIns="0" bIns="0">
+            <a:spAutoFit/>
+          </a:bodyPr>
+          <a:lstStyle/>
+          <a:p>
+            <a:pPr algn="ctr">
+              <a:lnSpc>
+                <a:spcPct val="130000"/>
+              </a:lnSpc>
+            </a:pPr>
+            <a:r>
+              <a:rPr sz="1000" b="0" i="0">
+                <a:solidFill>
+                  <a:srgbClr val="87867F"/>
+                </a:solidFill>
+                <a:latin typeface="PT Sans"/>
+              </a:rPr>
+              <a:t>12</a:t>
+            </a:r>
+          </a:p>
+        </p:txBody>
+      </p:sp>
+      <p:sp>
+        <p:nvSpPr>
+          <p:cNvPr id="20" name="TextBox 19"/>
+          <p:cNvSpPr txBox="1"/>
+          <p:nvPr/>
+        </p:nvSpPr>
+        <p:spPr>
+          <a:xfrm>
+            <a:off x="8590788" y="3995928"/>
+            <a:ext cx="457200" cy="256032"/>
+          </a:xfrm>
+          <a:prstGeom prst="rect">
+            <a:avLst/>
+          </a:prstGeom>
+          <a:noFill/>
+        </p:spPr>
+        <p:txBody>
+          <a:bodyPr wrap="square" anchor="t" lIns="0" rIns="0" tIns="0" bIns="0">
+            <a:spAutoFit/>
+          </a:bodyPr>
+          <a:lstStyle/>
+          <a:p>
+            <a:pPr algn="ctr">
+              <a:lnSpc>
+                <a:spcPct val="130000"/>
+              </a:lnSpc>
+            </a:pPr>
+            <a:r>
+              <a:rPr sz="1000" b="0" i="0">
+                <a:solidFill>
+                  <a:srgbClr val="87867F"/>
+                </a:solidFill>
+                <a:latin typeface="PT Sans"/>
+              </a:rPr>
+              <a:t>18</a:t>
+            </a:r>
+          </a:p>
+        </p:txBody>
+      </p:sp>
+      <p:sp>
+        <p:nvSpPr>
+          <p:cNvPr id="21" name="TextBox 20"/>
+          <p:cNvSpPr txBox="1"/>
+          <p:nvPr/>
+        </p:nvSpPr>
+        <p:spPr>
+          <a:xfrm>
+            <a:off x="11311128" y="3995928"/>
+            <a:ext cx="457200" cy="256032"/>
+          </a:xfrm>
+          <a:prstGeom prst="rect">
+            <a:avLst/>
+          </a:prstGeom>
+          <a:noFill/>
+        </p:spPr>
+        <p:txBody>
+          <a:bodyPr wrap="square" anchor="t" lIns="0" rIns="0" tIns="0" bIns="0">
+            <a:spAutoFit/>
+          </a:bodyPr>
+          <a:lstStyle/>
+          <a:p>
+            <a:pPr algn="ctr">
+              <a:lnSpc>
+                <a:spcPct val="130000"/>
+              </a:lnSpc>
+            </a:pPr>
+            <a:r>
+              <a:rPr sz="1000" b="0" i="0">
+                <a:solidFill>
+                  <a:srgbClr val="87867F"/>
+                </a:solidFill>
+                <a:latin typeface="PT Sans"/>
+              </a:rPr>
+              <a:t>24</a:t>
+            </a:r>
+          </a:p>
+        </p:txBody>
+      </p:sp>
+      <p:sp>
+        <p:nvSpPr>
+          <p:cNvPr id="22" name="Rounded Rectangle 21"/>
           <p:cNvSpPr/>
           <p:nvPr/>
         </p:nvSpPr>
         <p:spPr>
           <a:xfrm>
-            <a:off x="658368" y="4389120"/>
+            <a:off x="658368" y="4434840"/>
             <a:ext cx="5303520" cy="1645920"/>
           </a:xfrm>
           <a:prstGeom prst="roundRect">
@@ -16218,14 +15947,14 @@
       </p:sp>
       <p:sp>
         <p:nvSpPr>
-          <p:cNvPr id="30" name="TextBox 29"/>
+          <p:cNvPr id="23" name="TextBox 22"/>
           <p:cNvSpPr txBox="1"/>
           <p:nvPr/>
         </p:nvSpPr>
         <p:spPr>
           <a:xfrm>
             <a:off x="868680" y="4572000"/>
-            <a:ext cx="5029200" cy="365760"/>
+            <a:ext cx="5029200" cy="320040"/>
           </a:xfrm>
           <a:prstGeom prst="rect">
             <a:avLst/>
@@ -16257,29 +15986,29 @@
       </p:sp>
       <p:sp>
         <p:nvSpPr>
-          <p:cNvPr id="31" name="TextBox 30"/>
+          <p:cNvPr id="24" name="TextBox 23"/>
           <p:cNvSpPr txBox="1"/>
           <p:nvPr/>
         </p:nvSpPr>
         <p:spPr>
           <a:xfrm>
             <a:off x="868680" y="4937760"/>
-            <a:ext cx="5029200" cy="914400"/>
-          </a:xfrm>
-          <a:prstGeom prst="rect">
-            <a:avLst/>
-          </a:prstGeom>
-          <a:noFill/>
-        </p:spPr>
-        <p:txBody>
-          <a:bodyPr wrap="square" anchor="t" lIns="0" rIns="0" tIns="0" bIns="0">
-            <a:spAutoFit/>
-          </a:bodyPr>
-          <a:lstStyle/>
-          <a:p>
-            <a:pPr algn="l">
-              <a:lnSpc>
-                <a:spcPct val="150000"/>
+            <a:ext cx="5029200" cy="960120"/>
+          </a:xfrm>
+          <a:prstGeom prst="rect">
+            <a:avLst/>
+          </a:prstGeom>
+          <a:noFill/>
+        </p:spPr>
+        <p:txBody>
+          <a:bodyPr wrap="square" anchor="t" lIns="0" rIns="0" tIns="0" bIns="0">
+            <a:spAutoFit/>
+          </a:bodyPr>
+          <a:lstStyle/>
+          <a:p>
+            <a:pPr algn="l">
+              <a:lnSpc>
+                <a:spcPct val="145000"/>
               </a:lnSpc>
             </a:pPr>
             <a:r>
@@ -16295,7 +16024,7 @@
           <a:p>
             <a:pPr algn="l">
               <a:lnSpc>
-                <a:spcPct val="150000"/>
+                <a:spcPct val="145000"/>
               </a:lnSpc>
             </a:pPr>
             <a:r>
@@ -16311,7 +16040,7 @@
           <a:p>
             <a:pPr algn="l">
               <a:lnSpc>
-                <a:spcPct val="150000"/>
+                <a:spcPct val="145000"/>
               </a:lnSpc>
             </a:pPr>
             <a:r>
@@ -16328,13 +16057,13 @@
       </p:sp>
       <p:sp>
         <p:nvSpPr>
-          <p:cNvPr id="32" name="Rounded Rectangle 31"/>
+          <p:cNvPr id="25" name="Rounded Rectangle 24"/>
           <p:cNvSpPr/>
           <p:nvPr/>
         </p:nvSpPr>
         <p:spPr>
           <a:xfrm>
-            <a:off x="6263640" y="4389120"/>
+            <a:off x="6263640" y="4434840"/>
             <a:ext cx="5303520" cy="1645920"/>
           </a:xfrm>
           <a:prstGeom prst="roundRect">
@@ -16343,7 +16072,7 @@
             </a:avLst>
           </a:prstGeom>
           <a:solidFill>
-            <a:srgbClr val="F5E7DE"/>
+            <a:srgbClr val="F6F1E9"/>
           </a:solidFill>
           <a:ln>
             <a:noFill/>
@@ -16373,14 +16102,14 @@
       </p:sp>
       <p:sp>
         <p:nvSpPr>
-          <p:cNvPr id="33" name="TextBox 32"/>
+          <p:cNvPr id="26" name="TextBox 25"/>
           <p:cNvSpPr txBox="1"/>
           <p:nvPr/>
         </p:nvSpPr>
         <p:spPr>
           <a:xfrm>
             <a:off x="6492240" y="4572000"/>
-            <a:ext cx="5029200" cy="365760"/>
+            <a:ext cx="5029200" cy="320040"/>
           </a:xfrm>
           <a:prstGeom prst="rect">
             <a:avLst/>
@@ -16412,33 +16141,33 @@
       </p:sp>
       <p:sp>
         <p:nvSpPr>
-          <p:cNvPr id="34" name="TextBox 33"/>
+          <p:cNvPr id="27" name="TextBox 26"/>
           <p:cNvSpPr txBox="1"/>
           <p:nvPr/>
         </p:nvSpPr>
         <p:spPr>
           <a:xfrm>
             <a:off x="6492240" y="4937760"/>
-            <a:ext cx="5029200" cy="1097280"/>
-          </a:xfrm>
-          <a:prstGeom prst="rect">
-            <a:avLst/>
-          </a:prstGeom>
-          <a:noFill/>
-        </p:spPr>
-        <p:txBody>
-          <a:bodyPr wrap="square" anchor="t" lIns="0" rIns="0" tIns="0" bIns="0">
-            <a:spAutoFit/>
-          </a:bodyPr>
-          <a:lstStyle/>
-          <a:p>
-            <a:pPr algn="l">
-              <a:lnSpc>
-                <a:spcPct val="145000"/>
-              </a:lnSpc>
-            </a:pPr>
-            <a:r>
-              <a:rPr sz="1200" b="0" i="0">
+            <a:ext cx="5029200" cy="960120"/>
+          </a:xfrm>
+          <a:prstGeom prst="rect">
+            <a:avLst/>
+          </a:prstGeom>
+          <a:noFill/>
+        </p:spPr>
+        <p:txBody>
+          <a:bodyPr wrap="square" anchor="t" lIns="0" rIns="0" tIns="0" bIns="0">
+            <a:spAutoFit/>
+          </a:bodyPr>
+          <a:lstStyle/>
+          <a:p>
+            <a:pPr algn="l">
+              <a:lnSpc>
+                <a:spcPct val="140000"/>
+              </a:lnSpc>
+            </a:pPr>
+            <a:r>
+              <a:rPr sz="1300" b="0" i="0">
                 <a:solidFill>
                   <a:srgbClr val="141413"/>
                 </a:solidFill>
@@ -16450,11 +16179,11 @@
           <a:p>
             <a:pPr algn="l">
               <a:lnSpc>
-                <a:spcPct val="145000"/>
-              </a:lnSpc>
-            </a:pPr>
-            <a:r>
-              <a:rPr sz="1200" b="0" i="0">
+                <a:spcPct val="140000"/>
+              </a:lnSpc>
+            </a:pPr>
+            <a:r>
+              <a:rPr sz="1300" b="0" i="0">
                 <a:solidFill>
                   <a:srgbClr val="141413"/>
                 </a:solidFill>
@@ -16466,11 +16195,11 @@
           <a:p>
             <a:pPr algn="l">
               <a:lnSpc>
-                <a:spcPct val="145000"/>
-              </a:lnSpc>
-            </a:pPr>
-            <a:r>
-              <a:rPr sz="1200" b="0" i="0">
+                <a:spcPct val="140000"/>
+              </a:lnSpc>
+            </a:pPr>
+            <a:r>
+              <a:rPr sz="1300" b="0" i="0">
                 <a:solidFill>
                   <a:srgbClr val="141413"/>
                 </a:solidFill>
@@ -16483,7 +16212,7 @@
       </p:sp>
       <p:sp>
         <p:nvSpPr>
-          <p:cNvPr id="35" name="TextBox 34"/>
+          <p:cNvPr id="28" name="TextBox 27"/>
           <p:cNvSpPr txBox="1"/>
           <p:nvPr/>
         </p:nvSpPr>
@@ -16522,7 +16251,7 @@
       </p:sp>
       <p:sp>
         <p:nvSpPr>
-          <p:cNvPr id="36" name="TextBox 35"/>
+          <p:cNvPr id="29" name="TextBox 28"/>
           <p:cNvSpPr txBox="1"/>
           <p:nvPr/>
         </p:nvSpPr>
